--- a/2026-27/S05/MLOps_S05_CICD_Deployment_Strategies.pptx
+++ b/2026-27/S05/MLOps_S05_CICD_Deployment_Strategies.pptx
@@ -4501,7 +4501,7 @@
                 <a:ea typeface="Calibri" pitchFamily="34" charset="-122"/>
                 <a:cs typeface="Calibri" pitchFamily="34" charset="-120"/>
               </a:rPr>
-              <a:t>Master in Business Analytics and Big Data</a:t>
+              <a:t>Master in Business Analytics and Data Science</a:t>
             </a:r>
             <a:endParaRPr lang="en-US" sz="900" dirty="0"/>
           </a:p>
@@ -4540,7 +4540,7 @@
                 <a:ea typeface="Calibri" pitchFamily="34" charset="-122"/>
                 <a:cs typeface="Calibri" pitchFamily="34" charset="-120"/>
               </a:rPr>
-              <a:t>MLOps · MBABD-PT 2026–27 · Session 5 · Juan Ramírez</a:t>
+              <a:t>MLOps · MBDS-PT2026F · Session 5 · Juan Ramírez</a:t>
             </a:r>
             <a:endParaRPr lang="en-US" sz="800" dirty="0"/>
           </a:p>
@@ -4806,6 +4806,10 @@
             <a:prstDash val="solid"/>
           </a:ln>
         </p:spPr>
+        <p:txBody>
+          <a:bodyPr/>
+          <a:p/>
+        </p:txBody>
       </p:sp>
       <p:sp>
         <p:nvSpPr>
@@ -4872,6 +4876,10 @@
             <a:prstDash val="solid"/>
           </a:ln>
         </p:spPr>
+        <p:txBody>
+          <a:bodyPr/>
+          <a:p/>
+        </p:txBody>
       </p:sp>
       <p:sp>
         <p:nvSpPr>
@@ -4938,6 +4946,10 @@
             <a:prstDash val="solid"/>
           </a:ln>
         </p:spPr>
+        <p:txBody>
+          <a:bodyPr/>
+          <a:p/>
+        </p:txBody>
       </p:sp>
       <p:sp>
         <p:nvSpPr>
@@ -5004,6 +5016,10 @@
             <a:prstDash val="solid"/>
           </a:ln>
         </p:spPr>
+        <p:txBody>
+          <a:bodyPr/>
+          <a:p/>
+        </p:txBody>
       </p:sp>
       <p:sp>
         <p:nvSpPr>
@@ -5070,6 +5086,10 @@
             <a:prstDash val="solid"/>
           </a:ln>
         </p:spPr>
+        <p:txBody>
+          <a:bodyPr/>
+          <a:p/>
+        </p:txBody>
       </p:sp>
       <p:sp>
         <p:nvSpPr>
@@ -5136,6 +5156,10 @@
             <a:prstDash val="solid"/>
           </a:ln>
         </p:spPr>
+        <p:txBody>
+          <a:bodyPr/>
+          <a:p/>
+        </p:txBody>
       </p:sp>
       <p:sp>
         <p:nvSpPr>
@@ -5202,6 +5226,10 @@
             <a:prstDash val="solid"/>
           </a:ln>
         </p:spPr>
+        <p:txBody>
+          <a:bodyPr/>
+          <a:p/>
+        </p:txBody>
       </p:sp>
       <p:sp>
         <p:nvSpPr>
@@ -5268,6 +5296,10 @@
             <a:prstDash val="solid"/>
           </a:ln>
         </p:spPr>
+        <p:txBody>
+          <a:bodyPr/>
+          <a:p/>
+        </p:txBody>
       </p:sp>
       <p:sp>
         <p:nvSpPr>
@@ -5334,6 +5366,10 @@
             <a:prstDash val="solid"/>
           </a:ln>
         </p:spPr>
+        <p:txBody>
+          <a:bodyPr/>
+          <a:p/>
+        </p:txBody>
       </p:sp>
       <p:sp>
         <p:nvSpPr>
@@ -5374,6 +5410,30 @@
           </a:p>
         </p:txBody>
       </p:sp>
+      <p:pic>
+        <p:nvPicPr>
+          <p:cNvPr id="28" name="IE University logo" descr="IE University, School of Science &amp; Technology"/>
+          <p:cNvPicPr>
+            <a:picLocks noChangeAspect="1"/>
+          </p:cNvPicPr>
+          <p:nvPr/>
+        </p:nvPicPr>
+        <p:blipFill>
+          <a:blip r:embed="rId3"/>
+          <a:stretch>
+            <a:fillRect/>
+          </a:stretch>
+        </p:blipFill>
+        <p:spPr>
+          <a:xfrm>
+            <a:off x="8252653" y="109728"/>
+            <a:ext cx="525587" cy="704395"/>
+          </a:xfrm>
+          <a:prstGeom prst="rect">
+            <a:avLst/>
+          </a:prstGeom>
+        </p:spPr>
+      </p:pic>
     </p:spTree>
   </p:cSld>
   <p:clrMapOvr>
@@ -5439,7 +5499,7 @@
                 <a:ea typeface="Calibri" pitchFamily="34" charset="-122"/>
                 <a:cs typeface="Calibri" pitchFamily="34" charset="-120"/>
               </a:rPr>
-              <a:t>Master in Business Analytics and Big Data</a:t>
+              <a:t>Master in Business Analytics and Data Science</a:t>
             </a:r>
             <a:endParaRPr lang="en-US" sz="900" dirty="0"/>
           </a:p>
@@ -5478,7 +5538,7 @@
                 <a:ea typeface="Calibri" pitchFamily="34" charset="-122"/>
                 <a:cs typeface="Calibri" pitchFamily="34" charset="-120"/>
               </a:rPr>
-              <a:t>MLOps · MBABD-PT 2026–27 · Session 5 · Juan Ramírez</a:t>
+              <a:t>MLOps · MBDS-PT2026F · Session 5 · Juan Ramírez</a:t>
             </a:r>
             <a:endParaRPr lang="en-US" sz="800" dirty="0"/>
           </a:p>
@@ -5588,6 +5648,10 @@
             <a:prstDash val="solid"/>
           </a:ln>
         </p:spPr>
+        <p:txBody>
+          <a:bodyPr/>
+          <a:p/>
+        </p:txBody>
       </p:sp>
       <p:sp>
         <p:nvSpPr>
@@ -5693,6 +5757,10 @@
             <a:prstDash val="solid"/>
           </a:ln>
         </p:spPr>
+        <p:txBody>
+          <a:bodyPr/>
+          <a:p/>
+        </p:txBody>
       </p:sp>
       <p:sp>
         <p:nvSpPr>
@@ -5798,6 +5866,10 @@
             <a:prstDash val="solid"/>
           </a:ln>
         </p:spPr>
+        <p:txBody>
+          <a:bodyPr/>
+          <a:p/>
+        </p:txBody>
       </p:sp>
       <p:sp>
         <p:nvSpPr>
@@ -5903,6 +5975,10 @@
             <a:prstDash val="solid"/>
           </a:ln>
         </p:spPr>
+        <p:txBody>
+          <a:bodyPr/>
+          <a:p/>
+        </p:txBody>
       </p:sp>
       <p:pic>
         <p:nvPicPr>
@@ -5967,6 +6043,30 @@
           </a:p>
         </p:txBody>
       </p:sp>
+      <p:pic>
+        <p:nvPicPr>
+          <p:cNvPr id="19" name="IE University logo" descr="IE University, School of Science &amp; Technology"/>
+          <p:cNvPicPr>
+            <a:picLocks noChangeAspect="1"/>
+          </p:cNvPicPr>
+          <p:nvPr/>
+        </p:nvPicPr>
+        <p:blipFill>
+          <a:blip r:embed="rId4"/>
+          <a:stretch>
+            <a:fillRect/>
+          </a:stretch>
+        </p:blipFill>
+        <p:spPr>
+          <a:xfrm>
+            <a:off x="8013607" y="92634"/>
+            <a:ext cx="764633" cy="262789"/>
+          </a:xfrm>
+          <a:prstGeom prst="rect">
+            <a:avLst/>
+          </a:prstGeom>
+        </p:spPr>
+      </p:pic>
     </p:spTree>
   </p:cSld>
   <p:clrMapOvr>
@@ -6032,7 +6132,7 @@
                 <a:ea typeface="Calibri" pitchFamily="34" charset="-122"/>
                 <a:cs typeface="Calibri" pitchFamily="34" charset="-120"/>
               </a:rPr>
-              <a:t>Master in Business Analytics and Big Data</a:t>
+              <a:t>Master in Business Analytics and Data Science</a:t>
             </a:r>
             <a:endParaRPr lang="en-US" sz="900" dirty="0"/>
           </a:p>
@@ -6071,7 +6171,7 @@
                 <a:ea typeface="Calibri" pitchFamily="34" charset="-122"/>
                 <a:cs typeface="Calibri" pitchFamily="34" charset="-120"/>
               </a:rPr>
-              <a:t>MLOps · MBABD-PT 2026–27 · Session 5 · Juan Ramírez</a:t>
+              <a:t>MLOps · MBDS-PT2026F · Session 5 · Juan Ramírez</a:t>
             </a:r>
             <a:endParaRPr lang="en-US" sz="800" dirty="0"/>
           </a:p>
@@ -6179,6 +6279,10 @@
             <a:prstDash val="solid"/>
           </a:ln>
         </p:spPr>
+        <p:txBody>
+          <a:bodyPr/>
+          <a:p/>
+        </p:txBody>
       </p:sp>
       <p:pic>
         <p:nvPicPr>
@@ -6306,6 +6410,10 @@
             <a:prstDash val="solid"/>
           </a:ln>
         </p:spPr>
+        <p:txBody>
+          <a:bodyPr/>
+          <a:p/>
+        </p:txBody>
       </p:sp>
       <p:pic>
         <p:nvPicPr>
@@ -6433,6 +6541,10 @@
             <a:prstDash val="solid"/>
           </a:ln>
         </p:spPr>
+        <p:txBody>
+          <a:bodyPr/>
+          <a:p/>
+        </p:txBody>
       </p:sp>
       <p:pic>
         <p:nvPicPr>
@@ -6562,6 +6674,10 @@
             <a:prstDash val="solid"/>
           </a:ln>
         </p:spPr>
+        <p:txBody>
+          <a:bodyPr/>
+          <a:p/>
+        </p:txBody>
       </p:sp>
       <p:pic>
         <p:nvPicPr>
@@ -6665,6 +6781,30 @@
           </a:p>
         </p:txBody>
       </p:sp>
+      <p:pic>
+        <p:nvPicPr>
+          <p:cNvPr id="23" name="IE University logo" descr="IE University, School of Science &amp; Technology"/>
+          <p:cNvPicPr>
+            <a:picLocks noChangeAspect="1"/>
+          </p:cNvPicPr>
+          <p:nvPr/>
+        </p:nvPicPr>
+        <p:blipFill>
+          <a:blip r:embed="rId7"/>
+          <a:stretch>
+            <a:fillRect/>
+          </a:stretch>
+        </p:blipFill>
+        <p:spPr>
+          <a:xfrm>
+            <a:off x="8013607" y="92634"/>
+            <a:ext cx="764633" cy="262789"/>
+          </a:xfrm>
+          <a:prstGeom prst="rect">
+            <a:avLst/>
+          </a:prstGeom>
+        </p:spPr>
+      </p:pic>
     </p:spTree>
   </p:cSld>
   <p:clrMapOvr>
@@ -6730,7 +6870,7 @@
                 <a:ea typeface="Calibri" pitchFamily="34" charset="-122"/>
                 <a:cs typeface="Calibri" pitchFamily="34" charset="-120"/>
               </a:rPr>
-              <a:t>Master in Business Analytics and Big Data</a:t>
+              <a:t>Master in Business Analytics and Data Science</a:t>
             </a:r>
             <a:endParaRPr lang="en-US" sz="900" dirty="0"/>
           </a:p>
@@ -6769,7 +6909,7 @@
                 <a:ea typeface="Calibri" pitchFamily="34" charset="-122"/>
                 <a:cs typeface="Calibri" pitchFamily="34" charset="-120"/>
               </a:rPr>
-              <a:t>MLOps · MBABD-PT 2026–27 · Session 5 · Juan Ramírez</a:t>
+              <a:t>MLOps · MBDS-PT2026F · Session 5 · Juan Ramírez</a:t>
             </a:r>
             <a:endParaRPr lang="en-US" sz="800" dirty="0"/>
           </a:p>
@@ -6879,6 +7019,10 @@
             <a:prstDash val="solid"/>
           </a:ln>
         </p:spPr>
+        <p:txBody>
+          <a:bodyPr/>
+          <a:p/>
+        </p:txBody>
       </p:sp>
       <p:sp>
         <p:nvSpPr>
@@ -6904,6 +7048,10 @@
             <a:prstDash val="solid"/>
           </a:ln>
         </p:spPr>
+        <p:txBody>
+          <a:bodyPr/>
+          <a:p/>
+        </p:txBody>
       </p:sp>
       <p:pic>
         <p:nvPicPr>
@@ -7033,6 +7181,10 @@
             <a:prstDash val="solid"/>
           </a:ln>
         </p:spPr>
+        <p:txBody>
+          <a:bodyPr/>
+          <a:p/>
+        </p:txBody>
       </p:sp>
       <p:sp>
         <p:nvSpPr>
@@ -7058,6 +7210,10 @@
             <a:prstDash val="solid"/>
           </a:ln>
         </p:spPr>
+        <p:txBody>
+          <a:bodyPr/>
+          <a:p/>
+        </p:txBody>
       </p:sp>
       <p:pic>
         <p:nvPicPr>
@@ -7187,6 +7343,10 @@
             <a:prstDash val="solid"/>
           </a:ln>
         </p:spPr>
+        <p:txBody>
+          <a:bodyPr/>
+          <a:p/>
+        </p:txBody>
       </p:sp>
       <p:sp>
         <p:nvSpPr>
@@ -7212,6 +7372,10 @@
             <a:prstDash val="solid"/>
           </a:ln>
         </p:spPr>
+        <p:txBody>
+          <a:bodyPr/>
+          <a:p/>
+        </p:txBody>
       </p:sp>
       <p:pic>
         <p:nvPicPr>
@@ -7341,6 +7505,10 @@
             <a:prstDash val="solid"/>
           </a:ln>
         </p:spPr>
+        <p:txBody>
+          <a:bodyPr/>
+          <a:p/>
+        </p:txBody>
       </p:sp>
       <p:pic>
         <p:nvPicPr>
@@ -7405,6 +7573,30 @@
           </a:p>
         </p:txBody>
       </p:sp>
+      <p:pic>
+        <p:nvPicPr>
+          <p:cNvPr id="25" name="IE University logo" descr="IE University, School of Science &amp; Technology"/>
+          <p:cNvPicPr>
+            <a:picLocks noChangeAspect="1"/>
+          </p:cNvPicPr>
+          <p:nvPr/>
+        </p:nvPicPr>
+        <p:blipFill>
+          <a:blip r:embed="rId7"/>
+          <a:stretch>
+            <a:fillRect/>
+          </a:stretch>
+        </p:blipFill>
+        <p:spPr>
+          <a:xfrm>
+            <a:off x="8013607" y="92634"/>
+            <a:ext cx="764633" cy="262789"/>
+          </a:xfrm>
+          <a:prstGeom prst="rect">
+            <a:avLst/>
+          </a:prstGeom>
+        </p:spPr>
+      </p:pic>
     </p:spTree>
   </p:cSld>
   <p:clrMapOvr>
@@ -7470,7 +7662,7 @@
                 <a:ea typeface="Calibri" pitchFamily="34" charset="-122"/>
                 <a:cs typeface="Calibri" pitchFamily="34" charset="-120"/>
               </a:rPr>
-              <a:t>Master in Business Analytics and Big Data</a:t>
+              <a:t>Master in Business Analytics and Data Science</a:t>
             </a:r>
             <a:endParaRPr lang="en-US" sz="900" dirty="0"/>
           </a:p>
@@ -7509,7 +7701,7 @@
                 <a:ea typeface="Calibri" pitchFamily="34" charset="-122"/>
                 <a:cs typeface="Calibri" pitchFamily="34" charset="-120"/>
               </a:rPr>
-              <a:t>MLOps · MBABD-PT 2026–27 · Session 5 · Juan Ramírez</a:t>
+              <a:t>MLOps · MBDS-PT2026F · Session 5 · Juan Ramírez</a:t>
             </a:r>
             <a:endParaRPr lang="en-US" sz="800" dirty="0"/>
           </a:p>
@@ -7619,6 +7811,10 @@
             <a:prstDash val="solid"/>
           </a:ln>
         </p:spPr>
+        <p:txBody>
+          <a:bodyPr/>
+          <a:p/>
+        </p:txBody>
       </p:sp>
       <p:sp>
         <p:nvSpPr>
@@ -7644,6 +7840,10 @@
             <a:prstDash val="solid"/>
           </a:ln>
         </p:spPr>
+        <p:txBody>
+          <a:bodyPr/>
+          <a:p/>
+        </p:txBody>
       </p:sp>
       <p:pic>
         <p:nvPicPr>
@@ -7773,6 +7973,10 @@
             <a:prstDash val="solid"/>
           </a:ln>
         </p:spPr>
+        <p:txBody>
+          <a:bodyPr/>
+          <a:p/>
+        </p:txBody>
       </p:sp>
       <p:sp>
         <p:nvSpPr>
@@ -7798,6 +8002,10 @@
             <a:prstDash val="solid"/>
           </a:ln>
         </p:spPr>
+        <p:txBody>
+          <a:bodyPr/>
+          <a:p/>
+        </p:txBody>
       </p:sp>
       <p:pic>
         <p:nvPicPr>
@@ -7927,6 +8135,10 @@
             <a:prstDash val="solid"/>
           </a:ln>
         </p:spPr>
+        <p:txBody>
+          <a:bodyPr/>
+          <a:p/>
+        </p:txBody>
       </p:sp>
       <p:sp>
         <p:nvSpPr>
@@ -7952,6 +8164,10 @@
             <a:prstDash val="solid"/>
           </a:ln>
         </p:spPr>
+        <p:txBody>
+          <a:bodyPr/>
+          <a:p/>
+        </p:txBody>
       </p:sp>
       <p:pic>
         <p:nvPicPr>
@@ -8081,6 +8297,10 @@
             <a:prstDash val="solid"/>
           </a:ln>
         </p:spPr>
+        <p:txBody>
+          <a:bodyPr/>
+          <a:p/>
+        </p:txBody>
       </p:sp>
       <p:sp>
         <p:nvSpPr>
@@ -8106,6 +8326,10 @@
             <a:prstDash val="solid"/>
           </a:ln>
         </p:spPr>
+        <p:txBody>
+          <a:bodyPr/>
+          <a:p/>
+        </p:txBody>
       </p:sp>
       <p:pic>
         <p:nvPicPr>
@@ -8235,6 +8459,10 @@
             <a:prstDash val="solid"/>
           </a:ln>
         </p:spPr>
+        <p:txBody>
+          <a:bodyPr/>
+          <a:p/>
+        </p:txBody>
       </p:sp>
       <p:sp>
         <p:nvSpPr>
@@ -8260,6 +8488,10 @@
             <a:prstDash val="solid"/>
           </a:ln>
         </p:spPr>
+        <p:txBody>
+          <a:bodyPr/>
+          <a:p/>
+        </p:txBody>
       </p:sp>
       <p:pic>
         <p:nvPicPr>
@@ -8389,6 +8621,10 @@
             <a:prstDash val="solid"/>
           </a:ln>
         </p:spPr>
+        <p:txBody>
+          <a:bodyPr/>
+          <a:p/>
+        </p:txBody>
       </p:sp>
       <p:sp>
         <p:nvSpPr>
@@ -8414,6 +8650,10 @@
             <a:prstDash val="solid"/>
           </a:ln>
         </p:spPr>
+        <p:txBody>
+          <a:bodyPr/>
+          <a:p/>
+        </p:txBody>
       </p:sp>
       <p:pic>
         <p:nvPicPr>
@@ -8543,6 +8783,10 @@
             <a:prstDash val="solid"/>
           </a:ln>
         </p:spPr>
+        <p:txBody>
+          <a:bodyPr/>
+          <a:p/>
+        </p:txBody>
       </p:sp>
       <p:sp>
         <p:nvSpPr>
@@ -8568,6 +8812,10 @@
             <a:prstDash val="solid"/>
           </a:ln>
         </p:spPr>
+        <p:txBody>
+          <a:bodyPr/>
+          <a:p/>
+        </p:txBody>
       </p:sp>
       <p:pic>
         <p:nvPicPr>
@@ -8697,6 +8945,10 @@
             <a:prstDash val="solid"/>
           </a:ln>
         </p:spPr>
+        <p:txBody>
+          <a:bodyPr/>
+          <a:p/>
+        </p:txBody>
       </p:sp>
       <p:sp>
         <p:nvSpPr>
@@ -8776,6 +9028,30 @@
           </a:p>
         </p:txBody>
       </p:sp>
+      <p:pic>
+        <p:nvPicPr>
+          <p:cNvPr id="45" name="IE University logo" descr="IE University, School of Science &amp; Technology"/>
+          <p:cNvPicPr>
+            <a:picLocks noChangeAspect="1"/>
+          </p:cNvPicPr>
+          <p:nvPr/>
+        </p:nvPicPr>
+        <p:blipFill>
+          <a:blip r:embed="rId10"/>
+          <a:stretch>
+            <a:fillRect/>
+          </a:stretch>
+        </p:blipFill>
+        <p:spPr>
+          <a:xfrm>
+            <a:off x="8013607" y="92634"/>
+            <a:ext cx="764633" cy="262789"/>
+          </a:xfrm>
+          <a:prstGeom prst="rect">
+            <a:avLst/>
+          </a:prstGeom>
+        </p:spPr>
+      </p:pic>
     </p:spTree>
   </p:cSld>
   <p:clrMapOvr>
@@ -8841,7 +9117,7 @@
                 <a:ea typeface="Calibri" pitchFamily="34" charset="-122"/>
                 <a:cs typeface="Calibri" pitchFamily="34" charset="-120"/>
               </a:rPr>
-              <a:t>Master in Business Analytics and Big Data</a:t>
+              <a:t>Master in Business Analytics and Data Science</a:t>
             </a:r>
             <a:endParaRPr lang="en-US" sz="900" dirty="0"/>
           </a:p>
@@ -8880,7 +9156,7 @@
                 <a:ea typeface="Calibri" pitchFamily="34" charset="-122"/>
                 <a:cs typeface="Calibri" pitchFamily="34" charset="-120"/>
               </a:rPr>
-              <a:t>MLOps · MBABD-PT 2026–27 · Session 5 · Juan Ramírez</a:t>
+              <a:t>MLOps · MBDS-PT2026F · Session 5 · Juan Ramírez</a:t>
             </a:r>
             <a:endParaRPr lang="en-US" sz="800" dirty="0"/>
           </a:p>
@@ -8990,6 +9266,10 @@
             <a:prstDash val="solid"/>
           </a:ln>
         </p:spPr>
+        <p:txBody>
+          <a:bodyPr/>
+          <a:p/>
+        </p:txBody>
       </p:sp>
       <p:sp>
         <p:nvSpPr>
@@ -9015,6 +9295,10 @@
             <a:prstDash val="solid"/>
           </a:ln>
         </p:spPr>
+        <p:txBody>
+          <a:bodyPr/>
+          <a:p/>
+        </p:txBody>
       </p:sp>
       <p:pic>
         <p:nvPicPr>
@@ -9197,6 +9481,10 @@
             <a:prstDash val="solid"/>
           </a:ln>
         </p:spPr>
+        <p:txBody>
+          <a:bodyPr/>
+          <a:p/>
+        </p:txBody>
       </p:sp>
       <p:sp>
         <p:nvSpPr>
@@ -9222,6 +9510,10 @@
             <a:prstDash val="solid"/>
           </a:ln>
         </p:spPr>
+        <p:txBody>
+          <a:bodyPr/>
+          <a:p/>
+        </p:txBody>
       </p:sp>
       <p:pic>
         <p:nvPicPr>
@@ -9404,6 +9696,10 @@
             <a:prstDash val="solid"/>
           </a:ln>
         </p:spPr>
+        <p:txBody>
+          <a:bodyPr/>
+          <a:p/>
+        </p:txBody>
       </p:sp>
       <p:sp>
         <p:nvSpPr>
@@ -9429,6 +9725,10 @@
             <a:prstDash val="solid"/>
           </a:ln>
         </p:spPr>
+        <p:txBody>
+          <a:bodyPr/>
+          <a:p/>
+        </p:txBody>
       </p:sp>
       <p:pic>
         <p:nvPicPr>
@@ -9611,6 +9911,10 @@
             <a:prstDash val="solid"/>
           </a:ln>
         </p:spPr>
+        <p:txBody>
+          <a:bodyPr/>
+          <a:p/>
+        </p:txBody>
       </p:sp>
       <p:sp>
         <p:nvSpPr>
@@ -9636,6 +9940,10 @@
             <a:prstDash val="solid"/>
           </a:ln>
         </p:spPr>
+        <p:txBody>
+          <a:bodyPr/>
+          <a:p/>
+        </p:txBody>
       </p:sp>
       <p:pic>
         <p:nvPicPr>
@@ -9831,6 +10139,30 @@
           </a:p>
         </p:txBody>
       </p:sp>
+      <p:pic>
+        <p:nvPicPr>
+          <p:cNvPr id="32" name="IE University logo" descr="IE University, School of Science &amp; Technology"/>
+          <p:cNvPicPr>
+            <a:picLocks noChangeAspect="1"/>
+          </p:cNvPicPr>
+          <p:nvPr/>
+        </p:nvPicPr>
+        <p:blipFill>
+          <a:blip r:embed="rId7"/>
+          <a:stretch>
+            <a:fillRect/>
+          </a:stretch>
+        </p:blipFill>
+        <p:spPr>
+          <a:xfrm>
+            <a:off x="8013607" y="92634"/>
+            <a:ext cx="764633" cy="262789"/>
+          </a:xfrm>
+          <a:prstGeom prst="rect">
+            <a:avLst/>
+          </a:prstGeom>
+        </p:spPr>
+      </p:pic>
     </p:spTree>
   </p:cSld>
   <p:clrMapOvr>
@@ -9896,7 +10228,7 @@
                 <a:ea typeface="Calibri" pitchFamily="34" charset="-122"/>
                 <a:cs typeface="Calibri" pitchFamily="34" charset="-120"/>
               </a:rPr>
-              <a:t>Master in Business Analytics and Big Data</a:t>
+              <a:t>Master in Business Analytics and Data Science</a:t>
             </a:r>
             <a:endParaRPr lang="en-US" sz="900" dirty="0"/>
           </a:p>
@@ -9935,7 +10267,7 @@
                 <a:ea typeface="Calibri" pitchFamily="34" charset="-122"/>
                 <a:cs typeface="Calibri" pitchFamily="34" charset="-120"/>
               </a:rPr>
-              <a:t>MLOps · MBABD-PT 2026–27 · Session 5 · Juan Ramírez</a:t>
+              <a:t>MLOps · MBDS-PT2026F · Session 5 · Juan Ramírez</a:t>
             </a:r>
             <a:endParaRPr lang="en-US" sz="800" dirty="0"/>
           </a:p>
@@ -10045,6 +10377,10 @@
             <a:prstDash val="solid"/>
           </a:ln>
         </p:spPr>
+        <p:txBody>
+          <a:bodyPr/>
+          <a:p/>
+        </p:txBody>
       </p:sp>
       <p:sp>
         <p:nvSpPr>
@@ -10070,6 +10406,10 @@
             <a:prstDash val="solid"/>
           </a:ln>
         </p:spPr>
+        <p:txBody>
+          <a:bodyPr/>
+          <a:p/>
+        </p:txBody>
       </p:sp>
       <p:pic>
         <p:nvPicPr>
@@ -10245,6 +10585,10 @@
             <a:prstDash val="solid"/>
           </a:ln>
         </p:spPr>
+        <p:txBody>
+          <a:bodyPr/>
+          <a:p/>
+        </p:txBody>
       </p:sp>
       <p:sp>
         <p:nvSpPr>
@@ -10270,6 +10614,10 @@
             <a:prstDash val="solid"/>
           </a:ln>
         </p:spPr>
+        <p:txBody>
+          <a:bodyPr/>
+          <a:p/>
+        </p:txBody>
       </p:sp>
       <p:pic>
         <p:nvPicPr>
@@ -10445,6 +10793,10 @@
             <a:prstDash val="solid"/>
           </a:ln>
         </p:spPr>
+        <p:txBody>
+          <a:bodyPr/>
+          <a:p/>
+        </p:txBody>
       </p:sp>
       <p:pic>
         <p:nvPicPr>
@@ -10509,6 +10861,30 @@
           </a:p>
         </p:txBody>
       </p:sp>
+      <p:pic>
+        <p:nvPicPr>
+          <p:cNvPr id="20" name="IE University logo" descr="IE University, School of Science &amp; Technology"/>
+          <p:cNvPicPr>
+            <a:picLocks noChangeAspect="1"/>
+          </p:cNvPicPr>
+          <p:nvPr/>
+        </p:nvPicPr>
+        <p:blipFill>
+          <a:blip r:embed="rId6"/>
+          <a:stretch>
+            <a:fillRect/>
+          </a:stretch>
+        </p:blipFill>
+        <p:spPr>
+          <a:xfrm>
+            <a:off x="8013607" y="92634"/>
+            <a:ext cx="764633" cy="262789"/>
+          </a:xfrm>
+          <a:prstGeom prst="rect">
+            <a:avLst/>
+          </a:prstGeom>
+        </p:spPr>
+      </p:pic>
     </p:spTree>
   </p:cSld>
   <p:clrMapOvr>
@@ -10574,7 +10950,7 @@
                 <a:ea typeface="Calibri" pitchFamily="34" charset="-122"/>
                 <a:cs typeface="Calibri" pitchFamily="34" charset="-120"/>
               </a:rPr>
-              <a:t>Master in Business Analytics and Big Data</a:t>
+              <a:t>Master in Business Analytics and Data Science</a:t>
             </a:r>
             <a:endParaRPr lang="en-US" sz="900" dirty="0"/>
           </a:p>
@@ -10613,7 +10989,7 @@
                 <a:ea typeface="Calibri" pitchFamily="34" charset="-122"/>
                 <a:cs typeface="Calibri" pitchFamily="34" charset="-120"/>
               </a:rPr>
-              <a:t>MLOps · MBABD-PT 2026–27 · Session 5 · Juan Ramírez</a:t>
+              <a:t>MLOps · MBDS-PT2026F · Session 5 · Juan Ramírez</a:t>
             </a:r>
             <a:endParaRPr lang="en-US" sz="800" dirty="0"/>
           </a:p>
@@ -10762,6 +11138,10 @@
             <a:prstDash val="solid"/>
           </a:ln>
         </p:spPr>
+        <p:txBody>
+          <a:bodyPr/>
+          <a:p/>
+        </p:txBody>
       </p:sp>
       <p:sp>
         <p:nvSpPr>
@@ -10828,6 +11208,10 @@
             <a:prstDash val="solid"/>
           </a:ln>
         </p:spPr>
+        <p:txBody>
+          <a:bodyPr/>
+          <a:p/>
+        </p:txBody>
       </p:sp>
       <p:sp>
         <p:nvSpPr>
@@ -10894,6 +11278,10 @@
             <a:prstDash val="solid"/>
           </a:ln>
         </p:spPr>
+        <p:txBody>
+          <a:bodyPr/>
+          <a:p/>
+        </p:txBody>
       </p:sp>
       <p:sp>
         <p:nvSpPr>
@@ -10960,6 +11348,10 @@
             <a:prstDash val="solid"/>
           </a:ln>
         </p:spPr>
+        <p:txBody>
+          <a:bodyPr/>
+          <a:p/>
+        </p:txBody>
       </p:sp>
       <p:sp>
         <p:nvSpPr>
@@ -11026,6 +11418,10 @@
             <a:prstDash val="solid"/>
           </a:ln>
         </p:spPr>
+        <p:txBody>
+          <a:bodyPr/>
+          <a:p/>
+        </p:txBody>
       </p:sp>
       <p:sp>
         <p:nvSpPr>
@@ -11092,6 +11488,10 @@
             <a:prstDash val="solid"/>
           </a:ln>
         </p:spPr>
+        <p:txBody>
+          <a:bodyPr/>
+          <a:p/>
+        </p:txBody>
       </p:sp>
       <p:sp>
         <p:nvSpPr>
@@ -11158,6 +11558,10 @@
             <a:prstDash val="solid"/>
           </a:ln>
         </p:spPr>
+        <p:txBody>
+          <a:bodyPr/>
+          <a:p/>
+        </p:txBody>
       </p:sp>
       <p:sp>
         <p:nvSpPr>
@@ -11224,6 +11628,10 @@
             <a:prstDash val="solid"/>
           </a:ln>
         </p:spPr>
+        <p:txBody>
+          <a:bodyPr/>
+          <a:p/>
+        </p:txBody>
       </p:sp>
       <p:sp>
         <p:nvSpPr>
@@ -11290,6 +11698,10 @@
             <a:prstDash val="solid"/>
           </a:ln>
         </p:spPr>
+        <p:txBody>
+          <a:bodyPr/>
+          <a:p/>
+        </p:txBody>
       </p:sp>
       <p:sp>
         <p:nvSpPr>
@@ -11369,6 +11781,30 @@
           </a:p>
         </p:txBody>
       </p:sp>
+      <p:pic>
+        <p:nvPicPr>
+          <p:cNvPr id="26" name="IE University logo" descr="IE University, School of Science &amp; Technology"/>
+          <p:cNvPicPr>
+            <a:picLocks noChangeAspect="1"/>
+          </p:cNvPicPr>
+          <p:nvPr/>
+        </p:nvPicPr>
+        <p:blipFill>
+          <a:blip r:embed="rId3"/>
+          <a:stretch>
+            <a:fillRect/>
+          </a:stretch>
+        </p:blipFill>
+        <p:spPr>
+          <a:xfrm>
+            <a:off x="8252653" y="109728"/>
+            <a:ext cx="525587" cy="704395"/>
+          </a:xfrm>
+          <a:prstGeom prst="rect">
+            <a:avLst/>
+          </a:prstGeom>
+        </p:spPr>
+      </p:pic>
     </p:spTree>
   </p:cSld>
   <p:clrMapOvr>
@@ -11434,7 +11870,7 @@
                 <a:ea typeface="Calibri" pitchFamily="34" charset="-122"/>
                 <a:cs typeface="Calibri" pitchFamily="34" charset="-120"/>
               </a:rPr>
-              <a:t>Master in Business Analytics and Big Data</a:t>
+              <a:t>Master in Business Analytics and Data Science</a:t>
             </a:r>
             <a:endParaRPr lang="en-US" sz="900" dirty="0"/>
           </a:p>
@@ -11473,7 +11909,7 @@
                 <a:ea typeface="Calibri" pitchFamily="34" charset="-122"/>
                 <a:cs typeface="Calibri" pitchFamily="34" charset="-120"/>
               </a:rPr>
-              <a:t>MLOps · MBABD-PT 2026–27 · Session 5 · Juan Ramírez</a:t>
+              <a:t>MLOps · MBDS-PT2026F · Session 5 · Juan Ramírez</a:t>
             </a:r>
             <a:endParaRPr lang="en-US" sz="800" dirty="0"/>
           </a:p>
@@ -11583,6 +12019,10 @@
             <a:prstDash val="solid"/>
           </a:ln>
         </p:spPr>
+        <p:txBody>
+          <a:bodyPr/>
+          <a:p/>
+        </p:txBody>
       </p:sp>
       <p:sp>
         <p:nvSpPr>
@@ -11608,6 +12048,10 @@
             <a:prstDash val="solid"/>
           </a:ln>
         </p:spPr>
+        <p:txBody>
+          <a:bodyPr/>
+          <a:p/>
+        </p:txBody>
       </p:sp>
       <p:pic>
         <p:nvPicPr>
@@ -11737,6 +12181,10 @@
             <a:prstDash val="solid"/>
           </a:ln>
         </p:spPr>
+        <p:txBody>
+          <a:bodyPr/>
+          <a:p/>
+        </p:txBody>
       </p:sp>
       <p:sp>
         <p:nvSpPr>
@@ -11762,6 +12210,10 @@
             <a:prstDash val="solid"/>
           </a:ln>
         </p:spPr>
+        <p:txBody>
+          <a:bodyPr/>
+          <a:p/>
+        </p:txBody>
       </p:sp>
       <p:pic>
         <p:nvPicPr>
@@ -11930,6 +12382,10 @@
             <a:prstDash val="solid"/>
           </a:ln>
         </p:spPr>
+        <p:txBody>
+          <a:bodyPr/>
+          <a:p/>
+        </p:txBody>
       </p:sp>
       <p:sp>
         <p:nvSpPr>
@@ -11993,6 +12449,10 @@
             <a:tailEnd type="triangle"/>
           </a:ln>
         </p:spPr>
+        <p:txBody>
+          <a:bodyPr/>
+          <a:p/>
+        </p:txBody>
       </p:sp>
       <p:sp>
         <p:nvSpPr>
@@ -12020,6 +12480,10 @@
             <a:prstDash val="solid"/>
           </a:ln>
         </p:spPr>
+        <p:txBody>
+          <a:bodyPr/>
+          <a:p/>
+        </p:txBody>
       </p:sp>
       <p:sp>
         <p:nvSpPr>
@@ -12138,6 +12602,30 @@
           </a:p>
         </p:txBody>
       </p:sp>
+      <p:pic>
+        <p:nvPicPr>
+          <p:cNvPr id="25" name="IE University logo" descr="IE University, School of Science &amp; Technology"/>
+          <p:cNvPicPr>
+            <a:picLocks noChangeAspect="1"/>
+          </p:cNvPicPr>
+          <p:nvPr/>
+        </p:nvPicPr>
+        <p:blipFill>
+          <a:blip r:embed="rId5"/>
+          <a:stretch>
+            <a:fillRect/>
+          </a:stretch>
+        </p:blipFill>
+        <p:spPr>
+          <a:xfrm>
+            <a:off x="8013607" y="92634"/>
+            <a:ext cx="764633" cy="262789"/>
+          </a:xfrm>
+          <a:prstGeom prst="rect">
+            <a:avLst/>
+          </a:prstGeom>
+        </p:spPr>
+      </p:pic>
     </p:spTree>
   </p:cSld>
   <p:clrMapOvr>
@@ -12203,7 +12691,7 @@
                 <a:ea typeface="Calibri" pitchFamily="34" charset="-122"/>
                 <a:cs typeface="Calibri" pitchFamily="34" charset="-120"/>
               </a:rPr>
-              <a:t>Master in Business Analytics and Big Data</a:t>
+              <a:t>Master in Business Analytics and Data Science</a:t>
             </a:r>
             <a:endParaRPr lang="en-US" sz="900" dirty="0"/>
           </a:p>
@@ -12242,7 +12730,7 @@
                 <a:ea typeface="Calibri" pitchFamily="34" charset="-122"/>
                 <a:cs typeface="Calibri" pitchFamily="34" charset="-120"/>
               </a:rPr>
-              <a:t>MLOps · MBABD-PT 2026–27 · Session 5 · Juan Ramírez</a:t>
+              <a:t>MLOps · MBDS-PT2026F · Session 5 · Juan Ramírez</a:t>
             </a:r>
             <a:endParaRPr lang="en-US" sz="800" dirty="0"/>
           </a:p>
@@ -12469,6 +12957,10 @@
             <a:prstDash val="solid"/>
           </a:ln>
         </p:spPr>
+        <p:txBody>
+          <a:bodyPr/>
+          <a:p/>
+        </p:txBody>
       </p:sp>
       <p:sp>
         <p:nvSpPr>
@@ -12496,6 +12988,10 @@
             <a:prstDash val="solid"/>
           </a:ln>
         </p:spPr>
+        <p:txBody>
+          <a:bodyPr/>
+          <a:p/>
+        </p:txBody>
       </p:sp>
       <p:sp>
         <p:nvSpPr>
@@ -12601,6 +13097,10 @@
             <a:prstDash val="solid"/>
           </a:ln>
         </p:spPr>
+        <p:txBody>
+          <a:bodyPr/>
+          <a:p/>
+        </p:txBody>
       </p:sp>
       <p:sp>
         <p:nvSpPr>
@@ -12703,6 +13203,10 @@
             <a:tailEnd type="triangle"/>
           </a:ln>
         </p:spPr>
+        <p:txBody>
+          <a:bodyPr/>
+          <a:p/>
+        </p:txBody>
       </p:sp>
       <p:sp>
         <p:nvSpPr>
@@ -12730,6 +13234,10 @@
             <a:prstDash val="solid"/>
           </a:ln>
         </p:spPr>
+        <p:txBody>
+          <a:bodyPr/>
+          <a:p/>
+        </p:txBody>
       </p:sp>
       <p:sp>
         <p:nvSpPr>
@@ -12757,6 +13265,10 @@
             <a:prstDash val="solid"/>
           </a:ln>
         </p:spPr>
+        <p:txBody>
+          <a:bodyPr/>
+          <a:p/>
+        </p:txBody>
       </p:sp>
       <p:sp>
         <p:nvSpPr>
@@ -12862,6 +13374,10 @@
             <a:prstDash val="solid"/>
           </a:ln>
         </p:spPr>
+        <p:txBody>
+          <a:bodyPr/>
+          <a:p/>
+        </p:txBody>
       </p:sp>
       <p:sp>
         <p:nvSpPr>
@@ -12964,6 +13480,10 @@
             <a:tailEnd type="triangle"/>
           </a:ln>
         </p:spPr>
+        <p:txBody>
+          <a:bodyPr/>
+          <a:p/>
+        </p:txBody>
       </p:sp>
       <p:sp>
         <p:nvSpPr>
@@ -12991,6 +13511,10 @@
             <a:prstDash val="solid"/>
           </a:ln>
         </p:spPr>
+        <p:txBody>
+          <a:bodyPr/>
+          <a:p/>
+        </p:txBody>
       </p:sp>
       <p:sp>
         <p:nvSpPr>
@@ -13018,6 +13542,10 @@
             <a:prstDash val="solid"/>
           </a:ln>
         </p:spPr>
+        <p:txBody>
+          <a:bodyPr/>
+          <a:p/>
+        </p:txBody>
       </p:sp>
       <p:sp>
         <p:nvSpPr>
@@ -13123,6 +13651,10 @@
             <a:prstDash val="solid"/>
           </a:ln>
         </p:spPr>
+        <p:txBody>
+          <a:bodyPr/>
+          <a:p/>
+        </p:txBody>
       </p:sp>
       <p:sp>
         <p:nvSpPr>
@@ -13228,6 +13760,10 @@
             <a:prstDash val="solid"/>
           </a:ln>
         </p:spPr>
+        <p:txBody>
+          <a:bodyPr/>
+          <a:p/>
+        </p:txBody>
       </p:sp>
       <p:sp>
         <p:nvSpPr>
@@ -13253,6 +13789,10 @@
             <a:prstDash val="solid"/>
           </a:ln>
         </p:spPr>
+        <p:txBody>
+          <a:bodyPr/>
+          <a:p/>
+        </p:txBody>
       </p:sp>
       <p:pic>
         <p:nvPicPr>
@@ -13428,6 +13968,10 @@
             <a:prstDash val="solid"/>
           </a:ln>
         </p:spPr>
+        <p:txBody>
+          <a:bodyPr/>
+          <a:p/>
+        </p:txBody>
       </p:sp>
       <p:sp>
         <p:nvSpPr>
@@ -13453,6 +13997,10 @@
             <a:prstDash val="solid"/>
           </a:ln>
         </p:spPr>
+        <p:txBody>
+          <a:bodyPr/>
+          <a:p/>
+        </p:txBody>
       </p:sp>
       <p:pic>
         <p:nvPicPr>
@@ -13641,6 +14189,30 @@
           </a:p>
         </p:txBody>
       </p:sp>
+      <p:pic>
+        <p:nvPicPr>
+          <p:cNvPr id="44" name="IE University logo" descr="IE University, School of Science &amp; Technology"/>
+          <p:cNvPicPr>
+            <a:picLocks noChangeAspect="1"/>
+          </p:cNvPicPr>
+          <p:nvPr/>
+        </p:nvPicPr>
+        <p:blipFill>
+          <a:blip r:embed="rId5"/>
+          <a:stretch>
+            <a:fillRect/>
+          </a:stretch>
+        </p:blipFill>
+        <p:spPr>
+          <a:xfrm>
+            <a:off x="8013607" y="92634"/>
+            <a:ext cx="764633" cy="262789"/>
+          </a:xfrm>
+          <a:prstGeom prst="rect">
+            <a:avLst/>
+          </a:prstGeom>
+        </p:spPr>
+      </p:pic>
     </p:spTree>
   </p:cSld>
   <p:clrMapOvr>
@@ -13706,7 +14278,7 @@
                 <a:ea typeface="Calibri" pitchFamily="34" charset="-122"/>
                 <a:cs typeface="Calibri" pitchFamily="34" charset="-120"/>
               </a:rPr>
-              <a:t>Master in Business Analytics and Big Data</a:t>
+              <a:t>Master in Business Analytics and Data Science</a:t>
             </a:r>
             <a:endParaRPr lang="en-US" sz="900" dirty="0"/>
           </a:p>
@@ -13745,7 +14317,7 @@
                 <a:ea typeface="Calibri" pitchFamily="34" charset="-122"/>
                 <a:cs typeface="Calibri" pitchFamily="34" charset="-120"/>
               </a:rPr>
-              <a:t>MLOps · MBABD-PT 2026–27 · Session 5 · Juan Ramírez</a:t>
+              <a:t>MLOps · MBDS-PT2026F · Session 5 · Juan Ramírez</a:t>
             </a:r>
             <a:endParaRPr lang="en-US" sz="800" dirty="0"/>
           </a:p>
@@ -13972,6 +14544,10 @@
             <a:prstDash val="solid"/>
           </a:ln>
         </p:spPr>
+        <p:txBody>
+          <a:bodyPr/>
+          <a:p/>
+        </p:txBody>
       </p:sp>
       <p:sp>
         <p:nvSpPr>
@@ -13999,6 +14575,10 @@
             <a:prstDash val="solid"/>
           </a:ln>
         </p:spPr>
+        <p:txBody>
+          <a:bodyPr/>
+          <a:p/>
+        </p:txBody>
       </p:sp>
       <p:sp>
         <p:nvSpPr>
@@ -14101,6 +14681,10 @@
             <a:tailEnd type="triangle"/>
           </a:ln>
         </p:spPr>
+        <p:txBody>
+          <a:bodyPr/>
+          <a:p/>
+        </p:txBody>
       </p:sp>
       <p:sp>
         <p:nvSpPr>
@@ -14128,6 +14712,10 @@
             <a:prstDash val="solid"/>
           </a:ln>
         </p:spPr>
+        <p:txBody>
+          <a:bodyPr/>
+          <a:p/>
+        </p:txBody>
       </p:sp>
       <p:sp>
         <p:nvSpPr>
@@ -14155,6 +14743,10 @@
             <a:prstDash val="solid"/>
           </a:ln>
         </p:spPr>
+        <p:txBody>
+          <a:bodyPr/>
+          <a:p/>
+        </p:txBody>
       </p:sp>
       <p:sp>
         <p:nvSpPr>
@@ -14260,6 +14852,10 @@
             <a:prstDash val="solid"/>
           </a:ln>
         </p:spPr>
+        <p:txBody>
+          <a:bodyPr/>
+          <a:p/>
+        </p:txBody>
       </p:sp>
       <p:sp>
         <p:nvSpPr>
@@ -14362,6 +14958,10 @@
             <a:tailEnd type="triangle"/>
           </a:ln>
         </p:spPr>
+        <p:txBody>
+          <a:bodyPr/>
+          <a:p/>
+        </p:txBody>
       </p:sp>
       <p:sp>
         <p:nvSpPr>
@@ -14389,6 +14989,10 @@
             <a:prstDash val="solid"/>
           </a:ln>
         </p:spPr>
+        <p:txBody>
+          <a:bodyPr/>
+          <a:p/>
+        </p:txBody>
       </p:sp>
       <p:sp>
         <p:nvSpPr>
@@ -14416,6 +15020,10 @@
             <a:prstDash val="solid"/>
           </a:ln>
         </p:spPr>
+        <p:txBody>
+          <a:bodyPr/>
+          <a:p/>
+        </p:txBody>
       </p:sp>
       <p:sp>
         <p:nvSpPr>
@@ -14521,6 +15129,10 @@
             <a:prstDash val="solid"/>
           </a:ln>
         </p:spPr>
+        <p:txBody>
+          <a:bodyPr/>
+          <a:p/>
+        </p:txBody>
       </p:sp>
       <p:sp>
         <p:nvSpPr>
@@ -14626,6 +15238,10 @@
             <a:prstDash val="solid"/>
           </a:ln>
         </p:spPr>
+        <p:txBody>
+          <a:bodyPr/>
+          <a:p/>
+        </p:txBody>
       </p:sp>
       <p:sp>
         <p:nvSpPr>
@@ -14651,6 +15267,10 @@
             <a:prstDash val="solid"/>
           </a:ln>
         </p:spPr>
+        <p:txBody>
+          <a:bodyPr/>
+          <a:p/>
+        </p:txBody>
       </p:sp>
       <p:pic>
         <p:nvPicPr>
@@ -14826,6 +15446,10 @@
             <a:prstDash val="solid"/>
           </a:ln>
         </p:spPr>
+        <p:txBody>
+          <a:bodyPr/>
+          <a:p/>
+        </p:txBody>
       </p:sp>
       <p:sp>
         <p:nvSpPr>
@@ -14851,6 +15475,10 @@
             <a:prstDash val="solid"/>
           </a:ln>
         </p:spPr>
+        <p:txBody>
+          <a:bodyPr/>
+          <a:p/>
+        </p:txBody>
       </p:sp>
       <p:pic>
         <p:nvPicPr>
@@ -15039,6 +15667,30 @@
           </a:p>
         </p:txBody>
       </p:sp>
+      <p:pic>
+        <p:nvPicPr>
+          <p:cNvPr id="41" name="IE University logo" descr="IE University, School of Science &amp; Technology"/>
+          <p:cNvPicPr>
+            <a:picLocks noChangeAspect="1"/>
+          </p:cNvPicPr>
+          <p:nvPr/>
+        </p:nvPicPr>
+        <p:blipFill>
+          <a:blip r:embed="rId5"/>
+          <a:stretch>
+            <a:fillRect/>
+          </a:stretch>
+        </p:blipFill>
+        <p:spPr>
+          <a:xfrm>
+            <a:off x="8013607" y="92634"/>
+            <a:ext cx="764633" cy="262789"/>
+          </a:xfrm>
+          <a:prstGeom prst="rect">
+            <a:avLst/>
+          </a:prstGeom>
+        </p:spPr>
+      </p:pic>
     </p:spTree>
   </p:cSld>
   <p:clrMapOvr>
@@ -15104,7 +15756,7 @@
                 <a:ea typeface="Calibri" pitchFamily="34" charset="-122"/>
                 <a:cs typeface="Calibri" pitchFamily="34" charset="-120"/>
               </a:rPr>
-              <a:t>Master in Business Analytics and Big Data</a:t>
+              <a:t>Master in Business Analytics and Data Science</a:t>
             </a:r>
             <a:endParaRPr lang="en-US" sz="900" dirty="0"/>
           </a:p>
@@ -15143,7 +15795,7 @@
                 <a:ea typeface="Calibri" pitchFamily="34" charset="-122"/>
                 <a:cs typeface="Calibri" pitchFamily="34" charset="-120"/>
               </a:rPr>
-              <a:t>MLOps · MBABD-PT 2026–27 · Session 5 · Juan Ramírez</a:t>
+              <a:t>MLOps · MBDS-PT2026F · Session 5 · Juan Ramírez</a:t>
             </a:r>
             <a:endParaRPr lang="en-US" sz="800" dirty="0"/>
           </a:p>
@@ -15292,6 +15944,10 @@
             <a:prstDash val="solid"/>
           </a:ln>
         </p:spPr>
+        <p:txBody>
+          <a:bodyPr/>
+          <a:p/>
+        </p:txBody>
       </p:sp>
       <p:sp>
         <p:nvSpPr>
@@ -15480,6 +16136,10 @@
             <a:prstDash val="solid"/>
           </a:ln>
         </p:spPr>
+        <p:txBody>
+          <a:bodyPr/>
+          <a:p/>
+        </p:txBody>
       </p:sp>
       <p:pic>
         <p:nvPicPr>
@@ -15607,6 +16267,10 @@
             <a:prstDash val="solid"/>
           </a:ln>
         </p:spPr>
+        <p:txBody>
+          <a:bodyPr/>
+          <a:p/>
+        </p:txBody>
       </p:sp>
       <p:pic>
         <p:nvPicPr>
@@ -17066,6 +17730,30 @@
           </a:graphicData>
         </a:graphic>
       </p:graphicFrame>
+      <p:pic>
+        <p:nvPicPr>
+          <p:cNvPr id="20" name="IE University logo" descr="IE University, School of Science &amp; Technology"/>
+          <p:cNvPicPr>
+            <a:picLocks noChangeAspect="1"/>
+          </p:cNvPicPr>
+          <p:nvPr/>
+        </p:nvPicPr>
+        <p:blipFill>
+          <a:blip r:embed="rId5"/>
+          <a:stretch>
+            <a:fillRect/>
+          </a:stretch>
+        </p:blipFill>
+        <p:spPr>
+          <a:xfrm>
+            <a:off x="8013607" y="92634"/>
+            <a:ext cx="764633" cy="262789"/>
+          </a:xfrm>
+          <a:prstGeom prst="rect">
+            <a:avLst/>
+          </a:prstGeom>
+        </p:spPr>
+      </p:pic>
     </p:spTree>
   </p:cSld>
   <p:clrMapOvr>
@@ -17131,7 +17819,7 @@
                 <a:ea typeface="Calibri" pitchFamily="34" charset="-122"/>
                 <a:cs typeface="Calibri" pitchFamily="34" charset="-120"/>
               </a:rPr>
-              <a:t>Master in Business Analytics and Big Data</a:t>
+              <a:t>Master in Business Analytics and Data Science</a:t>
             </a:r>
             <a:endParaRPr lang="en-US" sz="900" dirty="0"/>
           </a:p>
@@ -17170,7 +17858,7 @@
                 <a:ea typeface="Calibri" pitchFamily="34" charset="-122"/>
                 <a:cs typeface="Calibri" pitchFamily="34" charset="-120"/>
               </a:rPr>
-              <a:t>MLOps · MBABD-PT 2026–27 · Session 5 · Juan Ramírez</a:t>
+              <a:t>MLOps · MBDS-PT2026F · Session 5 · Juan Ramírez</a:t>
             </a:r>
             <a:endParaRPr lang="en-US" sz="800" dirty="0"/>
           </a:p>
@@ -17397,6 +18085,10 @@
             <a:prstDash val="solid"/>
           </a:ln>
         </p:spPr>
+        <p:txBody>
+          <a:bodyPr/>
+          <a:p/>
+        </p:txBody>
       </p:sp>
       <p:sp>
         <p:nvSpPr>
@@ -17424,6 +18116,10 @@
             <a:prstDash val="solid"/>
           </a:ln>
         </p:spPr>
+        <p:txBody>
+          <a:bodyPr/>
+          <a:p/>
+        </p:txBody>
       </p:sp>
       <p:sp>
         <p:nvSpPr>
@@ -17526,6 +18222,10 @@
             <a:tailEnd type="triangle"/>
           </a:ln>
         </p:spPr>
+        <p:txBody>
+          <a:bodyPr/>
+          <a:p/>
+        </p:txBody>
       </p:sp>
       <p:sp>
         <p:nvSpPr>
@@ -17553,6 +18253,10 @@
             <a:prstDash val="solid"/>
           </a:ln>
         </p:spPr>
+        <p:txBody>
+          <a:bodyPr/>
+          <a:p/>
+        </p:txBody>
       </p:sp>
       <p:sp>
         <p:nvSpPr>
@@ -17580,6 +18284,10 @@
             <a:prstDash val="solid"/>
           </a:ln>
         </p:spPr>
+        <p:txBody>
+          <a:bodyPr/>
+          <a:p/>
+        </p:txBody>
       </p:sp>
       <p:sp>
         <p:nvSpPr>
@@ -17685,6 +18393,10 @@
             <a:prstDash val="solid"/>
           </a:ln>
         </p:spPr>
+        <p:txBody>
+          <a:bodyPr/>
+          <a:p/>
+        </p:txBody>
       </p:sp>
       <p:sp>
         <p:nvSpPr>
@@ -17787,6 +18499,10 @@
             <a:tailEnd type="triangle"/>
           </a:ln>
         </p:spPr>
+        <p:txBody>
+          <a:bodyPr/>
+          <a:p/>
+        </p:txBody>
       </p:sp>
       <p:sp>
         <p:nvSpPr>
@@ -17814,6 +18530,10 @@
             <a:prstDash val="solid"/>
           </a:ln>
         </p:spPr>
+        <p:txBody>
+          <a:bodyPr/>
+          <a:p/>
+        </p:txBody>
       </p:sp>
       <p:sp>
         <p:nvSpPr>
@@ -17841,6 +18561,10 @@
             <a:prstDash val="solid"/>
           </a:ln>
         </p:spPr>
+        <p:txBody>
+          <a:bodyPr/>
+          <a:p/>
+        </p:txBody>
       </p:sp>
       <p:sp>
         <p:nvSpPr>
@@ -17946,6 +18670,10 @@
             <a:prstDash val="solid"/>
           </a:ln>
         </p:spPr>
+        <p:txBody>
+          <a:bodyPr/>
+          <a:p/>
+        </p:txBody>
       </p:sp>
       <p:sp>
         <p:nvSpPr>
@@ -18051,6 +18779,10 @@
             <a:prstDash val="solid"/>
           </a:ln>
         </p:spPr>
+        <p:txBody>
+          <a:bodyPr/>
+          <a:p/>
+        </p:txBody>
       </p:sp>
       <p:sp>
         <p:nvSpPr>
@@ -18076,6 +18808,10 @@
             <a:prstDash val="solid"/>
           </a:ln>
         </p:spPr>
+        <p:txBody>
+          <a:bodyPr/>
+          <a:p/>
+        </p:txBody>
       </p:sp>
       <p:pic>
         <p:nvPicPr>
@@ -18251,6 +18987,10 @@
             <a:prstDash val="solid"/>
           </a:ln>
         </p:spPr>
+        <p:txBody>
+          <a:bodyPr/>
+          <a:p/>
+        </p:txBody>
       </p:sp>
       <p:sp>
         <p:nvSpPr>
@@ -18276,6 +19016,10 @@
             <a:prstDash val="solid"/>
           </a:ln>
         </p:spPr>
+        <p:txBody>
+          <a:bodyPr/>
+          <a:p/>
+        </p:txBody>
       </p:sp>
       <p:pic>
         <p:nvPicPr>
@@ -18464,6 +19208,30 @@
           </a:p>
         </p:txBody>
       </p:sp>
+      <p:pic>
+        <p:nvPicPr>
+          <p:cNvPr id="41" name="IE University logo" descr="IE University, School of Science &amp; Technology"/>
+          <p:cNvPicPr>
+            <a:picLocks noChangeAspect="1"/>
+          </p:cNvPicPr>
+          <p:nvPr/>
+        </p:nvPicPr>
+        <p:blipFill>
+          <a:blip r:embed="rId5"/>
+          <a:stretch>
+            <a:fillRect/>
+          </a:stretch>
+        </p:blipFill>
+        <p:spPr>
+          <a:xfrm>
+            <a:off x="8013607" y="92634"/>
+            <a:ext cx="764633" cy="262789"/>
+          </a:xfrm>
+          <a:prstGeom prst="rect">
+            <a:avLst/>
+          </a:prstGeom>
+        </p:spPr>
+      </p:pic>
     </p:spTree>
   </p:cSld>
   <p:clrMapOvr>
@@ -18529,7 +19297,7 @@
                 <a:ea typeface="Calibri" pitchFamily="34" charset="-122"/>
                 <a:cs typeface="Calibri" pitchFamily="34" charset="-120"/>
               </a:rPr>
-              <a:t>Master in Business Analytics and Big Data</a:t>
+              <a:t>Master in Business Analytics and Data Science</a:t>
             </a:r>
             <a:endParaRPr lang="en-US" sz="900" dirty="0"/>
           </a:p>
@@ -18568,7 +19336,7 @@
                 <a:ea typeface="Calibri" pitchFamily="34" charset="-122"/>
                 <a:cs typeface="Calibri" pitchFamily="34" charset="-120"/>
               </a:rPr>
-              <a:t>MLOps · MBABD-PT 2026–27 · Session 5 · Juan Ramírez</a:t>
+              <a:t>MLOps · MBDS-PT2026F · Session 5 · Juan Ramírez</a:t>
             </a:r>
             <a:endParaRPr lang="en-US" sz="800" dirty="0"/>
           </a:p>
@@ -18678,6 +19446,10 @@
             <a:prstDash val="solid"/>
           </a:ln>
         </p:spPr>
+        <p:txBody>
+          <a:bodyPr/>
+          <a:p/>
+        </p:txBody>
       </p:sp>
       <p:sp>
         <p:nvSpPr>
@@ -18703,6 +19475,10 @@
             <a:prstDash val="solid"/>
           </a:ln>
         </p:spPr>
+        <p:txBody>
+          <a:bodyPr/>
+          <a:p/>
+        </p:txBody>
       </p:sp>
       <p:pic>
         <p:nvPicPr>
@@ -18878,6 +19654,10 @@
             <a:prstDash val="solid"/>
           </a:ln>
         </p:spPr>
+        <p:txBody>
+          <a:bodyPr/>
+          <a:p/>
+        </p:txBody>
       </p:sp>
       <p:sp>
         <p:nvSpPr>
@@ -18903,6 +19683,10 @@
             <a:prstDash val="solid"/>
           </a:ln>
         </p:spPr>
+        <p:txBody>
+          <a:bodyPr/>
+          <a:p/>
+        </p:txBody>
       </p:sp>
       <p:pic>
         <p:nvPicPr>
@@ -19115,6 +19899,10 @@
             <a:prstDash val="solid"/>
           </a:ln>
         </p:spPr>
+        <p:txBody>
+          <a:bodyPr/>
+          <a:p/>
+        </p:txBody>
       </p:sp>
       <p:pic>
         <p:nvPicPr>
@@ -19242,6 +20030,10 @@
             <a:prstDash val="solid"/>
           </a:ln>
         </p:spPr>
+        <p:txBody>
+          <a:bodyPr/>
+          <a:p/>
+        </p:txBody>
       </p:sp>
       <p:pic>
         <p:nvPicPr>
@@ -19369,6 +20161,10 @@
             <a:prstDash val="solid"/>
           </a:ln>
         </p:spPr>
+        <p:txBody>
+          <a:bodyPr/>
+          <a:p/>
+        </p:txBody>
       </p:sp>
       <p:pic>
         <p:nvPicPr>
@@ -19472,6 +20268,30 @@
           </a:p>
         </p:txBody>
       </p:sp>
+      <p:pic>
+        <p:nvPicPr>
+          <p:cNvPr id="30" name="IE University logo" descr="IE University, School of Science &amp; Technology"/>
+          <p:cNvPicPr>
+            <a:picLocks noChangeAspect="1"/>
+          </p:cNvPicPr>
+          <p:nvPr/>
+        </p:nvPicPr>
+        <p:blipFill>
+          <a:blip r:embed="rId8"/>
+          <a:stretch>
+            <a:fillRect/>
+          </a:stretch>
+        </p:blipFill>
+        <p:spPr>
+          <a:xfrm>
+            <a:off x="8013607" y="92634"/>
+            <a:ext cx="764633" cy="262789"/>
+          </a:xfrm>
+          <a:prstGeom prst="rect">
+            <a:avLst/>
+          </a:prstGeom>
+        </p:spPr>
+      </p:pic>
     </p:spTree>
   </p:cSld>
   <p:clrMapOvr>
@@ -19537,7 +20357,7 @@
                 <a:ea typeface="Calibri" pitchFamily="34" charset="-122"/>
                 <a:cs typeface="Calibri" pitchFamily="34" charset="-120"/>
               </a:rPr>
-              <a:t>Master in Business Analytics and Big Data</a:t>
+              <a:t>Master in Business Analytics and Data Science</a:t>
             </a:r>
             <a:endParaRPr lang="en-US" sz="900" dirty="0"/>
           </a:p>
@@ -19576,7 +20396,7 @@
                 <a:ea typeface="Calibri" pitchFamily="34" charset="-122"/>
                 <a:cs typeface="Calibri" pitchFamily="34" charset="-120"/>
               </a:rPr>
-              <a:t>MLOps · MBABD-PT 2026–27 · Session 5 · Juan Ramírez</a:t>
+              <a:t>MLOps · MBDS-PT2026F · Session 5 · Juan Ramírez</a:t>
             </a:r>
             <a:endParaRPr lang="en-US" sz="800" dirty="0"/>
           </a:p>
@@ -22079,6 +22899,10 @@
             <a:prstDash val="solid"/>
           </a:ln>
         </p:spPr>
+        <p:txBody>
+          <a:bodyPr/>
+          <a:p/>
+        </p:txBody>
       </p:sp>
       <p:pic>
         <p:nvPicPr>
@@ -22143,6 +22967,30 @@
           </a:p>
         </p:txBody>
       </p:sp>
+      <p:pic>
+        <p:nvPicPr>
+          <p:cNvPr id="24" name="IE University logo" descr="IE University, School of Science &amp; Technology"/>
+          <p:cNvPicPr>
+            <a:picLocks noChangeAspect="1"/>
+          </p:cNvPicPr>
+          <p:nvPr/>
+        </p:nvPicPr>
+        <p:blipFill>
+          <a:blip r:embed="rId4"/>
+          <a:stretch>
+            <a:fillRect/>
+          </a:stretch>
+        </p:blipFill>
+        <p:spPr>
+          <a:xfrm>
+            <a:off x="8013607" y="92634"/>
+            <a:ext cx="764633" cy="262789"/>
+          </a:xfrm>
+          <a:prstGeom prst="rect">
+            <a:avLst/>
+          </a:prstGeom>
+        </p:spPr>
+      </p:pic>
     </p:spTree>
   </p:cSld>
   <p:clrMapOvr>
@@ -22208,7 +23056,7 @@
                 <a:ea typeface="Calibri" pitchFamily="34" charset="-122"/>
                 <a:cs typeface="Calibri" pitchFamily="34" charset="-120"/>
               </a:rPr>
-              <a:t>Master in Business Analytics and Big Data</a:t>
+              <a:t>Master in Business Analytics and Data Science</a:t>
             </a:r>
             <a:endParaRPr lang="en-US" sz="900" dirty="0"/>
           </a:p>
@@ -22247,7 +23095,7 @@
                 <a:ea typeface="Calibri" pitchFamily="34" charset="-122"/>
                 <a:cs typeface="Calibri" pitchFamily="34" charset="-120"/>
               </a:rPr>
-              <a:t>MLOps · MBABD-PT 2026–27 · Session 5 · Juan Ramírez</a:t>
+              <a:t>MLOps · MBDS-PT2026F · Session 5 · Juan Ramírez</a:t>
             </a:r>
             <a:endParaRPr lang="en-US" sz="800" dirty="0"/>
           </a:p>
@@ -22370,6 +23218,30 @@
           </a:p>
         </p:txBody>
       </p:sp>
+      <p:pic>
+        <p:nvPicPr>
+          <p:cNvPr id="7" name="IE University logo" descr="IE University, School of Science &amp; Technology"/>
+          <p:cNvPicPr>
+            <a:picLocks noChangeAspect="1"/>
+          </p:cNvPicPr>
+          <p:nvPr/>
+        </p:nvPicPr>
+        <p:blipFill>
+          <a:blip r:embed="rId3"/>
+          <a:stretch>
+            <a:fillRect/>
+          </a:stretch>
+        </p:blipFill>
+        <p:spPr>
+          <a:xfrm>
+            <a:off x="8252653" y="109728"/>
+            <a:ext cx="525587" cy="704395"/>
+          </a:xfrm>
+          <a:prstGeom prst="rect">
+            <a:avLst/>
+          </a:prstGeom>
+        </p:spPr>
+      </p:pic>
     </p:spTree>
   </p:cSld>
   <p:clrMapOvr>
@@ -22435,7 +23307,7 @@
                 <a:ea typeface="Calibri" pitchFamily="34" charset="-122"/>
                 <a:cs typeface="Calibri" pitchFamily="34" charset="-120"/>
               </a:rPr>
-              <a:t>Master in Business Analytics and Big Data</a:t>
+              <a:t>Master in Business Analytics and Data Science</a:t>
             </a:r>
             <a:endParaRPr lang="en-US" sz="900" dirty="0"/>
           </a:p>
@@ -22474,7 +23346,7 @@
                 <a:ea typeface="Calibri" pitchFamily="34" charset="-122"/>
                 <a:cs typeface="Calibri" pitchFamily="34" charset="-120"/>
               </a:rPr>
-              <a:t>MLOps · MBABD-PT 2026–27 · Session 5 · Juan Ramírez</a:t>
+              <a:t>MLOps · MBDS-PT2026F · Session 5 · Juan Ramírez</a:t>
             </a:r>
             <a:endParaRPr lang="en-US" sz="800" dirty="0"/>
           </a:p>
@@ -22623,6 +23495,10 @@
             <a:prstDash val="solid"/>
           </a:ln>
         </p:spPr>
+        <p:txBody>
+          <a:bodyPr/>
+          <a:p/>
+        </p:txBody>
       </p:sp>
       <p:sp>
         <p:nvSpPr>
@@ -22689,6 +23565,10 @@
             <a:prstDash val="solid"/>
           </a:ln>
         </p:spPr>
+        <p:txBody>
+          <a:bodyPr/>
+          <a:p/>
+        </p:txBody>
       </p:sp>
       <p:sp>
         <p:nvSpPr>
@@ -22755,6 +23635,10 @@
             <a:prstDash val="solid"/>
           </a:ln>
         </p:spPr>
+        <p:txBody>
+          <a:bodyPr/>
+          <a:p/>
+        </p:txBody>
       </p:sp>
       <p:sp>
         <p:nvSpPr>
@@ -22821,6 +23705,10 @@
             <a:prstDash val="solid"/>
           </a:ln>
         </p:spPr>
+        <p:txBody>
+          <a:bodyPr/>
+          <a:p/>
+        </p:txBody>
       </p:sp>
       <p:sp>
         <p:nvSpPr>
@@ -22887,6 +23775,10 @@
             <a:prstDash val="solid"/>
           </a:ln>
         </p:spPr>
+        <p:txBody>
+          <a:bodyPr/>
+          <a:p/>
+        </p:txBody>
       </p:sp>
       <p:sp>
         <p:nvSpPr>
@@ -22953,6 +23845,10 @@
             <a:prstDash val="solid"/>
           </a:ln>
         </p:spPr>
+        <p:txBody>
+          <a:bodyPr/>
+          <a:p/>
+        </p:txBody>
       </p:sp>
       <p:sp>
         <p:nvSpPr>
@@ -23019,6 +23915,10 @@
             <a:prstDash val="solid"/>
           </a:ln>
         </p:spPr>
+        <p:txBody>
+          <a:bodyPr/>
+          <a:p/>
+        </p:txBody>
       </p:sp>
       <p:sp>
         <p:nvSpPr>
@@ -23085,6 +23985,10 @@
             <a:prstDash val="solid"/>
           </a:ln>
         </p:spPr>
+        <p:txBody>
+          <a:bodyPr/>
+          <a:p/>
+        </p:txBody>
       </p:sp>
       <p:sp>
         <p:nvSpPr>
@@ -23151,6 +24055,10 @@
             <a:prstDash val="solid"/>
           </a:ln>
         </p:spPr>
+        <p:txBody>
+          <a:bodyPr/>
+          <a:p/>
+        </p:txBody>
       </p:sp>
       <p:sp>
         <p:nvSpPr>
@@ -23230,6 +24138,30 @@
           </a:p>
         </p:txBody>
       </p:sp>
+      <p:pic>
+        <p:nvPicPr>
+          <p:cNvPr id="26" name="IE University logo" descr="IE University, School of Science &amp; Technology"/>
+          <p:cNvPicPr>
+            <a:picLocks noChangeAspect="1"/>
+          </p:cNvPicPr>
+          <p:nvPr/>
+        </p:nvPicPr>
+        <p:blipFill>
+          <a:blip r:embed="rId3"/>
+          <a:stretch>
+            <a:fillRect/>
+          </a:stretch>
+        </p:blipFill>
+        <p:spPr>
+          <a:xfrm>
+            <a:off x="8252653" y="109728"/>
+            <a:ext cx="525587" cy="704395"/>
+          </a:xfrm>
+          <a:prstGeom prst="rect">
+            <a:avLst/>
+          </a:prstGeom>
+        </p:spPr>
+      </p:pic>
     </p:spTree>
   </p:cSld>
   <p:clrMapOvr>
@@ -23295,7 +24227,7 @@
                 <a:ea typeface="Calibri" pitchFamily="34" charset="-122"/>
                 <a:cs typeface="Calibri" pitchFamily="34" charset="-120"/>
               </a:rPr>
-              <a:t>Master in Business Analytics and Big Data</a:t>
+              <a:t>Master in Business Analytics and Data Science</a:t>
             </a:r>
             <a:endParaRPr lang="en-US" sz="900" dirty="0"/>
           </a:p>
@@ -23334,7 +24266,7 @@
                 <a:ea typeface="Calibri" pitchFamily="34" charset="-122"/>
                 <a:cs typeface="Calibri" pitchFamily="34" charset="-120"/>
               </a:rPr>
-              <a:t>MLOps · MBABD-PT 2026–27 · Session 5 · Juan Ramírez</a:t>
+              <a:t>MLOps · MBDS-PT2026F · Session 5 · Juan Ramírez</a:t>
             </a:r>
             <a:endParaRPr lang="en-US" sz="800" dirty="0"/>
           </a:p>
@@ -23444,6 +24376,10 @@
             <a:prstDash val="solid"/>
           </a:ln>
         </p:spPr>
+        <p:txBody>
+          <a:bodyPr/>
+          <a:p/>
+        </p:txBody>
       </p:sp>
       <p:sp>
         <p:nvSpPr>
@@ -23469,6 +24405,10 @@
             <a:prstDash val="solid"/>
           </a:ln>
         </p:spPr>
+        <p:txBody>
+          <a:bodyPr/>
+          <a:p/>
+        </p:txBody>
       </p:sp>
       <p:pic>
         <p:nvPicPr>
@@ -23644,6 +24584,10 @@
             <a:prstDash val="solid"/>
           </a:ln>
         </p:spPr>
+        <p:txBody>
+          <a:bodyPr/>
+          <a:p/>
+        </p:txBody>
       </p:sp>
       <p:sp>
         <p:nvSpPr>
@@ -23669,6 +24613,10 @@
             <a:prstDash val="solid"/>
           </a:ln>
         </p:spPr>
+        <p:txBody>
+          <a:bodyPr/>
+          <a:p/>
+        </p:txBody>
       </p:sp>
       <p:pic>
         <p:nvPicPr>
@@ -23844,6 +24792,10 @@
             <a:prstDash val="solid"/>
           </a:ln>
         </p:spPr>
+        <p:txBody>
+          <a:bodyPr/>
+          <a:p/>
+        </p:txBody>
       </p:sp>
       <p:sp>
         <p:nvSpPr>
@@ -23869,6 +24821,10 @@
             <a:prstDash val="solid"/>
           </a:ln>
         </p:spPr>
+        <p:txBody>
+          <a:bodyPr/>
+          <a:p/>
+        </p:txBody>
       </p:sp>
       <p:pic>
         <p:nvPicPr>
@@ -24023,6 +24979,10 @@
             <a:prstDash val="solid"/>
           </a:ln>
         </p:spPr>
+        <p:txBody>
+          <a:bodyPr/>
+          <a:p/>
+        </p:txBody>
       </p:sp>
       <p:sp>
         <p:nvSpPr>
@@ -24086,6 +25046,10 @@
             <a:tailEnd type="triangle"/>
           </a:ln>
         </p:spPr>
+        <p:txBody>
+          <a:bodyPr/>
+          <a:p/>
+        </p:txBody>
       </p:sp>
       <p:sp>
         <p:nvSpPr>
@@ -24113,6 +25077,10 @@
             <a:prstDash val="solid"/>
           </a:ln>
         </p:spPr>
+        <p:txBody>
+          <a:bodyPr/>
+          <a:p/>
+        </p:txBody>
       </p:sp>
       <p:sp>
         <p:nvSpPr>
@@ -24176,6 +25144,10 @@
             <a:tailEnd type="triangle"/>
           </a:ln>
         </p:spPr>
+        <p:txBody>
+          <a:bodyPr/>
+          <a:p/>
+        </p:txBody>
       </p:sp>
       <p:sp>
         <p:nvSpPr>
@@ -24203,6 +25175,10 @@
             <a:prstDash val="solid"/>
           </a:ln>
         </p:spPr>
+        <p:txBody>
+          <a:bodyPr/>
+          <a:p/>
+        </p:txBody>
       </p:sp>
       <p:sp>
         <p:nvSpPr>
@@ -24266,6 +25242,10 @@
             <a:tailEnd type="triangle"/>
           </a:ln>
         </p:spPr>
+        <p:txBody>
+          <a:bodyPr/>
+          <a:p/>
+        </p:txBody>
       </p:sp>
       <p:sp>
         <p:nvSpPr>
@@ -24293,6 +25273,10 @@
             <a:prstDash val="solid"/>
           </a:ln>
         </p:spPr>
+        <p:txBody>
+          <a:bodyPr/>
+          <a:p/>
+        </p:txBody>
       </p:sp>
       <p:sp>
         <p:nvSpPr>
@@ -24356,6 +25340,10 @@
             <a:tailEnd type="triangle"/>
           </a:ln>
         </p:spPr>
+        <p:txBody>
+          <a:bodyPr/>
+          <a:p/>
+        </p:txBody>
       </p:sp>
       <p:sp>
         <p:nvSpPr>
@@ -24383,6 +25371,10 @@
             <a:prstDash val="solid"/>
           </a:ln>
         </p:spPr>
+        <p:txBody>
+          <a:bodyPr/>
+          <a:p/>
+        </p:txBody>
       </p:sp>
       <p:sp>
         <p:nvSpPr>
@@ -24462,6 +25454,30 @@
           </a:p>
         </p:txBody>
       </p:sp>
+      <p:pic>
+        <p:nvPicPr>
+          <p:cNvPr id="37" name="IE University logo" descr="IE University, School of Science &amp; Technology"/>
+          <p:cNvPicPr>
+            <a:picLocks noChangeAspect="1"/>
+          </p:cNvPicPr>
+          <p:nvPr/>
+        </p:nvPicPr>
+        <p:blipFill>
+          <a:blip r:embed="rId6"/>
+          <a:stretch>
+            <a:fillRect/>
+          </a:stretch>
+        </p:blipFill>
+        <p:spPr>
+          <a:xfrm>
+            <a:off x="8013607" y="92634"/>
+            <a:ext cx="764633" cy="262789"/>
+          </a:xfrm>
+          <a:prstGeom prst="rect">
+            <a:avLst/>
+          </a:prstGeom>
+        </p:spPr>
+      </p:pic>
     </p:spTree>
   </p:cSld>
   <p:clrMapOvr>
@@ -24527,7 +25543,7 @@
                 <a:ea typeface="Calibri" pitchFamily="34" charset="-122"/>
                 <a:cs typeface="Calibri" pitchFamily="34" charset="-120"/>
               </a:rPr>
-              <a:t>Master in Business Analytics and Big Data</a:t>
+              <a:t>Master in Business Analytics and Data Science</a:t>
             </a:r>
             <a:endParaRPr lang="en-US" sz="900" dirty="0"/>
           </a:p>
@@ -24566,7 +25582,7 @@
                 <a:ea typeface="Calibri" pitchFamily="34" charset="-122"/>
                 <a:cs typeface="Calibri" pitchFamily="34" charset="-120"/>
               </a:rPr>
-              <a:t>MLOps · MBABD-PT 2026–27 · Session 5 · Juan Ramírez</a:t>
+              <a:t>MLOps · MBDS-PT2026F · Session 5 · Juan Ramírez</a:t>
             </a:r>
             <a:endParaRPr lang="en-US" sz="800" dirty="0"/>
           </a:p>
@@ -24676,6 +25692,10 @@
             <a:prstDash val="solid"/>
           </a:ln>
         </p:spPr>
+        <p:txBody>
+          <a:bodyPr/>
+          <a:p/>
+        </p:txBody>
       </p:sp>
       <p:sp>
         <p:nvSpPr>
@@ -24701,6 +25721,10 @@
             <a:prstDash val="solid"/>
           </a:ln>
         </p:spPr>
+        <p:txBody>
+          <a:bodyPr/>
+          <a:p/>
+        </p:txBody>
       </p:sp>
       <p:pic>
         <p:nvPicPr>
@@ -24897,6 +25921,10 @@
             <a:prstDash val="solid"/>
           </a:ln>
         </p:spPr>
+        <p:txBody>
+          <a:bodyPr/>
+          <a:p/>
+        </p:txBody>
       </p:sp>
       <p:sp>
         <p:nvSpPr>
@@ -24922,6 +25950,10 @@
             <a:prstDash val="solid"/>
           </a:ln>
         </p:spPr>
+        <p:txBody>
+          <a:bodyPr/>
+          <a:p/>
+        </p:txBody>
       </p:sp>
       <p:pic>
         <p:nvPicPr>
@@ -25118,6 +26150,10 @@
             <a:prstDash val="solid"/>
           </a:ln>
         </p:spPr>
+        <p:txBody>
+          <a:bodyPr/>
+          <a:p/>
+        </p:txBody>
       </p:sp>
       <p:pic>
         <p:nvPicPr>
@@ -25182,6 +26218,30 @@
           </a:p>
         </p:txBody>
       </p:sp>
+      <p:pic>
+        <p:nvPicPr>
+          <p:cNvPr id="20" name="IE University logo" descr="IE University, School of Science &amp; Technology"/>
+          <p:cNvPicPr>
+            <a:picLocks noChangeAspect="1"/>
+          </p:cNvPicPr>
+          <p:nvPr/>
+        </p:nvPicPr>
+        <p:blipFill>
+          <a:blip r:embed="rId6"/>
+          <a:stretch>
+            <a:fillRect/>
+          </a:stretch>
+        </p:blipFill>
+        <p:spPr>
+          <a:xfrm>
+            <a:off x="8013607" y="92634"/>
+            <a:ext cx="764633" cy="262789"/>
+          </a:xfrm>
+          <a:prstGeom prst="rect">
+            <a:avLst/>
+          </a:prstGeom>
+        </p:spPr>
+      </p:pic>
     </p:spTree>
   </p:cSld>
   <p:clrMapOvr>
@@ -25247,7 +26307,7 @@
                 <a:ea typeface="Calibri" pitchFamily="34" charset="-122"/>
                 <a:cs typeface="Calibri" pitchFamily="34" charset="-120"/>
               </a:rPr>
-              <a:t>Master in Business Analytics and Big Data</a:t>
+              <a:t>Master in Business Analytics and Data Science</a:t>
             </a:r>
             <a:endParaRPr lang="en-US" sz="900" dirty="0"/>
           </a:p>
@@ -25286,7 +26346,7 @@
                 <a:ea typeface="Calibri" pitchFamily="34" charset="-122"/>
                 <a:cs typeface="Calibri" pitchFamily="34" charset="-120"/>
               </a:rPr>
-              <a:t>MLOps · MBABD-PT 2026–27 · Session 5 · Juan Ramírez</a:t>
+              <a:t>MLOps · MBDS-PT2026F · Session 5 · Juan Ramírez</a:t>
             </a:r>
             <a:endParaRPr lang="en-US" sz="800" dirty="0"/>
           </a:p>
@@ -25396,6 +26456,10 @@
             <a:prstDash val="solid"/>
           </a:ln>
         </p:spPr>
+        <p:txBody>
+          <a:bodyPr/>
+          <a:p/>
+        </p:txBody>
       </p:sp>
       <p:sp>
         <p:nvSpPr>
@@ -25421,6 +26485,10 @@
             <a:prstDash val="solid"/>
           </a:ln>
         </p:spPr>
+        <p:txBody>
+          <a:bodyPr/>
+          <a:p/>
+        </p:txBody>
       </p:sp>
       <p:pic>
         <p:nvPicPr>
@@ -25550,6 +26618,10 @@
             <a:prstDash val="solid"/>
           </a:ln>
         </p:spPr>
+        <p:txBody>
+          <a:bodyPr/>
+          <a:p/>
+        </p:txBody>
       </p:sp>
       <p:sp>
         <p:nvSpPr>
@@ -25575,6 +26647,10 @@
             <a:prstDash val="solid"/>
           </a:ln>
         </p:spPr>
+        <p:txBody>
+          <a:bodyPr/>
+          <a:p/>
+        </p:txBody>
       </p:sp>
       <p:pic>
         <p:nvPicPr>
@@ -25704,6 +26780,10 @@
             <a:prstDash val="solid"/>
           </a:ln>
         </p:spPr>
+        <p:txBody>
+          <a:bodyPr/>
+          <a:p/>
+        </p:txBody>
       </p:sp>
       <p:sp>
         <p:nvSpPr>
@@ -25729,6 +26809,10 @@
             <a:prstDash val="solid"/>
           </a:ln>
         </p:spPr>
+        <p:txBody>
+          <a:bodyPr/>
+          <a:p/>
+        </p:txBody>
       </p:sp>
       <p:pic>
         <p:nvPicPr>
@@ -25895,6 +26979,10 @@
             <a:prstDash val="solid"/>
           </a:ln>
         </p:spPr>
+        <p:txBody>
+          <a:bodyPr/>
+          <a:p/>
+        </p:txBody>
       </p:sp>
       <p:sp>
         <p:nvSpPr>
@@ -25959,6 +27047,10 @@
             <a:prstDash val="solid"/>
           </a:ln>
         </p:spPr>
+        <p:txBody>
+          <a:bodyPr/>
+          <a:p/>
+        </p:txBody>
       </p:sp>
       <p:sp>
         <p:nvSpPr>
@@ -26023,6 +27115,10 @@
             <a:prstDash val="solid"/>
           </a:ln>
         </p:spPr>
+        <p:txBody>
+          <a:bodyPr/>
+          <a:p/>
+        </p:txBody>
       </p:sp>
       <p:sp>
         <p:nvSpPr>
@@ -26087,6 +27183,10 @@
             <a:prstDash val="solid"/>
           </a:ln>
         </p:spPr>
+        <p:txBody>
+          <a:bodyPr/>
+          <a:p/>
+        </p:txBody>
       </p:sp>
       <p:sp>
         <p:nvSpPr>
@@ -26151,6 +27251,10 @@
             <a:prstDash val="solid"/>
           </a:ln>
         </p:spPr>
+        <p:txBody>
+          <a:bodyPr/>
+          <a:p/>
+        </p:txBody>
       </p:sp>
       <p:sp>
         <p:nvSpPr>
@@ -26217,6 +27321,10 @@
             <a:prstDash val="solid"/>
           </a:ln>
         </p:spPr>
+        <p:txBody>
+          <a:bodyPr/>
+          <a:p/>
+        </p:txBody>
       </p:sp>
       <p:sp>
         <p:nvSpPr>
@@ -26322,6 +27430,10 @@
             <a:prstDash val="solid"/>
           </a:ln>
         </p:spPr>
+        <p:txBody>
+          <a:bodyPr/>
+          <a:p/>
+        </p:txBody>
       </p:sp>
       <p:sp>
         <p:nvSpPr>
@@ -26401,6 +27513,30 @@
           </a:p>
         </p:txBody>
       </p:sp>
+      <p:pic>
+        <p:nvPicPr>
+          <p:cNvPr id="39" name="IE University logo" descr="IE University, School of Science &amp; Technology"/>
+          <p:cNvPicPr>
+            <a:picLocks noChangeAspect="1"/>
+          </p:cNvPicPr>
+          <p:nvPr/>
+        </p:nvPicPr>
+        <p:blipFill>
+          <a:blip r:embed="rId6"/>
+          <a:stretch>
+            <a:fillRect/>
+          </a:stretch>
+        </p:blipFill>
+        <p:spPr>
+          <a:xfrm>
+            <a:off x="8013607" y="92634"/>
+            <a:ext cx="764633" cy="262789"/>
+          </a:xfrm>
+          <a:prstGeom prst="rect">
+            <a:avLst/>
+          </a:prstGeom>
+        </p:spPr>
+      </p:pic>
     </p:spTree>
   </p:cSld>
   <p:clrMapOvr>
@@ -26466,7 +27602,7 @@
                 <a:ea typeface="Calibri" pitchFamily="34" charset="-122"/>
                 <a:cs typeface="Calibri" pitchFamily="34" charset="-120"/>
               </a:rPr>
-              <a:t>Master in Business Analytics and Big Data</a:t>
+              <a:t>Master in Business Analytics and Data Science</a:t>
             </a:r>
             <a:endParaRPr lang="en-US" sz="900" dirty="0"/>
           </a:p>
@@ -26505,7 +27641,7 @@
                 <a:ea typeface="Calibri" pitchFamily="34" charset="-122"/>
                 <a:cs typeface="Calibri" pitchFamily="34" charset="-120"/>
               </a:rPr>
-              <a:t>MLOps · MBABD-PT 2026–27 · Session 5 · Juan Ramírez</a:t>
+              <a:t>MLOps · MBDS-PT2026F · Session 5 · Juan Ramírez</a:t>
             </a:r>
             <a:endParaRPr lang="en-US" sz="800" dirty="0"/>
           </a:p>
@@ -26615,6 +27751,10 @@
             <a:prstDash val="solid"/>
           </a:ln>
         </p:spPr>
+        <p:txBody>
+          <a:bodyPr/>
+          <a:p/>
+        </p:txBody>
       </p:sp>
       <p:sp>
         <p:nvSpPr>
@@ -26640,6 +27780,10 @@
             <a:prstDash val="solid"/>
           </a:ln>
         </p:spPr>
+        <p:txBody>
+          <a:bodyPr/>
+          <a:p/>
+        </p:txBody>
       </p:sp>
       <p:pic>
         <p:nvPicPr>
@@ -26857,6 +28001,10 @@
             <a:prstDash val="solid"/>
           </a:ln>
         </p:spPr>
+        <p:txBody>
+          <a:bodyPr/>
+          <a:p/>
+        </p:txBody>
       </p:sp>
       <p:sp>
         <p:nvSpPr>
@@ -26882,6 +28030,10 @@
             <a:prstDash val="solid"/>
           </a:ln>
         </p:spPr>
+        <p:txBody>
+          <a:bodyPr/>
+          <a:p/>
+        </p:txBody>
       </p:sp>
       <p:pic>
         <p:nvPicPr>
@@ -27099,6 +28251,10 @@
             <a:prstDash val="solid"/>
           </a:ln>
         </p:spPr>
+        <p:txBody>
+          <a:bodyPr/>
+          <a:p/>
+        </p:txBody>
       </p:sp>
       <p:pic>
         <p:nvPicPr>
@@ -27163,6 +28319,30 @@
           </a:p>
         </p:txBody>
       </p:sp>
+      <p:pic>
+        <p:nvPicPr>
+          <p:cNvPr id="20" name="IE University logo" descr="IE University, School of Science &amp; Technology"/>
+          <p:cNvPicPr>
+            <a:picLocks noChangeAspect="1"/>
+          </p:cNvPicPr>
+          <p:nvPr/>
+        </p:nvPicPr>
+        <p:blipFill>
+          <a:blip r:embed="rId6"/>
+          <a:stretch>
+            <a:fillRect/>
+          </a:stretch>
+        </p:blipFill>
+        <p:spPr>
+          <a:xfrm>
+            <a:off x="8013607" y="92634"/>
+            <a:ext cx="764633" cy="262789"/>
+          </a:xfrm>
+          <a:prstGeom prst="rect">
+            <a:avLst/>
+          </a:prstGeom>
+        </p:spPr>
+      </p:pic>
     </p:spTree>
   </p:cSld>
   <p:clrMapOvr>
@@ -27228,7 +28408,7 @@
                 <a:ea typeface="Calibri" pitchFamily="34" charset="-122"/>
                 <a:cs typeface="Calibri" pitchFamily="34" charset="-120"/>
               </a:rPr>
-              <a:t>Master in Business Analytics and Big Data</a:t>
+              <a:t>Master in Business Analytics and Data Science</a:t>
             </a:r>
             <a:endParaRPr lang="en-US" sz="900" dirty="0"/>
           </a:p>
@@ -27267,7 +28447,7 @@
                 <a:ea typeface="Calibri" pitchFamily="34" charset="-122"/>
                 <a:cs typeface="Calibri" pitchFamily="34" charset="-120"/>
               </a:rPr>
-              <a:t>MLOps · MBABD-PT 2026–27 · Session 5 · Juan Ramírez</a:t>
+              <a:t>MLOps · MBDS-PT2026F · Session 5 · Juan Ramírez</a:t>
             </a:r>
             <a:endParaRPr lang="en-US" sz="800" dirty="0"/>
           </a:p>
@@ -27525,6 +28705,10 @@
             <a:prstDash val="solid"/>
           </a:ln>
         </p:spPr>
+        <p:txBody>
+          <a:bodyPr/>
+          <a:p/>
+        </p:txBody>
       </p:sp>
       <p:sp>
         <p:nvSpPr>
@@ -27713,6 +28897,30 @@
           </a:p>
         </p:txBody>
       </p:sp>
+      <p:pic>
+        <p:nvPicPr>
+          <p:cNvPr id="11" name="IE University logo" descr="IE University, School of Science &amp; Technology"/>
+          <p:cNvPicPr>
+            <a:picLocks noChangeAspect="1"/>
+          </p:cNvPicPr>
+          <p:nvPr/>
+        </p:nvPicPr>
+        <p:blipFill>
+          <a:blip r:embed="rId3"/>
+          <a:stretch>
+            <a:fillRect/>
+          </a:stretch>
+        </p:blipFill>
+        <p:spPr>
+          <a:xfrm>
+            <a:off x="8013607" y="92634"/>
+            <a:ext cx="764633" cy="262789"/>
+          </a:xfrm>
+          <a:prstGeom prst="rect">
+            <a:avLst/>
+          </a:prstGeom>
+        </p:spPr>
+      </p:pic>
     </p:spTree>
   </p:cSld>
   <p:clrMapOvr>
@@ -27778,7 +28986,7 @@
                 <a:ea typeface="Calibri" pitchFamily="34" charset="-122"/>
                 <a:cs typeface="Calibri" pitchFamily="34" charset="-120"/>
               </a:rPr>
-              <a:t>Master in Business Analytics and Big Data</a:t>
+              <a:t>Master in Business Analytics and Data Science</a:t>
             </a:r>
             <a:endParaRPr lang="en-US" sz="900" dirty="0"/>
           </a:p>
@@ -27817,7 +29025,7 @@
                 <a:ea typeface="Calibri" pitchFamily="34" charset="-122"/>
                 <a:cs typeface="Calibri" pitchFamily="34" charset="-120"/>
               </a:rPr>
-              <a:t>MLOps · MBABD-PT 2026–27 · Session 5 · Juan Ramírez</a:t>
+              <a:t>MLOps · MBDS-PT2026F · Session 5 · Juan Ramírez</a:t>
             </a:r>
             <a:endParaRPr lang="en-US" sz="800" dirty="0"/>
           </a:p>
@@ -28111,6 +29319,10 @@
             <a:prstDash val="solid"/>
           </a:ln>
         </p:spPr>
+        <p:txBody>
+          <a:bodyPr/>
+          <a:p/>
+        </p:txBody>
       </p:sp>
       <p:sp>
         <p:nvSpPr>
@@ -28213,6 +29425,10 @@
             <a:tailEnd type="triangle"/>
           </a:ln>
         </p:spPr>
+        <p:txBody>
+          <a:bodyPr/>
+          <a:p/>
+        </p:txBody>
       </p:sp>
       <p:sp>
         <p:nvSpPr>
@@ -28240,6 +29456,10 @@
             <a:prstDash val="solid"/>
           </a:ln>
         </p:spPr>
+        <p:txBody>
+          <a:bodyPr/>
+          <a:p/>
+        </p:txBody>
       </p:sp>
       <p:sp>
         <p:nvSpPr>
@@ -28342,6 +29562,10 @@
             <a:tailEnd type="triangle"/>
           </a:ln>
         </p:spPr>
+        <p:txBody>
+          <a:bodyPr/>
+          <a:p/>
+        </p:txBody>
       </p:sp>
       <p:sp>
         <p:nvSpPr>
@@ -28369,6 +29593,10 @@
             <a:prstDash val="solid"/>
           </a:ln>
         </p:spPr>
+        <p:txBody>
+          <a:bodyPr/>
+          <a:p/>
+        </p:txBody>
       </p:sp>
       <p:sp>
         <p:nvSpPr>
@@ -28471,6 +29699,10 @@
             <a:tailEnd type="triangle"/>
           </a:ln>
         </p:spPr>
+        <p:txBody>
+          <a:bodyPr/>
+          <a:p/>
+        </p:txBody>
       </p:sp>
       <p:sp>
         <p:nvSpPr>
@@ -28498,6 +29730,10 @@
             <a:prstDash val="solid"/>
           </a:ln>
         </p:spPr>
+        <p:txBody>
+          <a:bodyPr/>
+          <a:p/>
+        </p:txBody>
       </p:sp>
       <p:sp>
         <p:nvSpPr>
@@ -28603,6 +29839,10 @@
             <a:prstDash val="solid"/>
           </a:ln>
         </p:spPr>
+        <p:txBody>
+          <a:bodyPr/>
+          <a:p/>
+        </p:txBody>
       </p:sp>
       <p:pic>
         <p:nvPicPr>
@@ -28667,6 +29907,30 @@
           </a:p>
         </p:txBody>
       </p:sp>
+      <p:pic>
+        <p:nvPicPr>
+          <p:cNvPr id="28" name="IE University logo" descr="IE University, School of Science &amp; Technology"/>
+          <p:cNvPicPr>
+            <a:picLocks noChangeAspect="1"/>
+          </p:cNvPicPr>
+          <p:nvPr/>
+        </p:nvPicPr>
+        <p:blipFill>
+          <a:blip r:embed="rId4"/>
+          <a:stretch>
+            <a:fillRect/>
+          </a:stretch>
+        </p:blipFill>
+        <p:spPr>
+          <a:xfrm>
+            <a:off x="8013607" y="92634"/>
+            <a:ext cx="764633" cy="262789"/>
+          </a:xfrm>
+          <a:prstGeom prst="rect">
+            <a:avLst/>
+          </a:prstGeom>
+        </p:spPr>
+      </p:pic>
     </p:spTree>
   </p:cSld>
   <p:clrMapOvr>
@@ -28732,7 +29996,7 @@
                 <a:ea typeface="Calibri" pitchFamily="34" charset="-122"/>
                 <a:cs typeface="Calibri" pitchFamily="34" charset="-120"/>
               </a:rPr>
-              <a:t>Master in Business Analytics and Big Data</a:t>
+              <a:t>Master in Business Analytics and Data Science</a:t>
             </a:r>
             <a:endParaRPr lang="en-US" sz="900" dirty="0"/>
           </a:p>
@@ -28771,7 +30035,7 @@
                 <a:ea typeface="Calibri" pitchFamily="34" charset="-122"/>
                 <a:cs typeface="Calibri" pitchFamily="34" charset="-120"/>
               </a:rPr>
-              <a:t>MLOps · MBABD-PT 2026–27 · Session 5 · Juan Ramírez</a:t>
+              <a:t>MLOps · MBDS-PT2026F · Session 5 · Juan Ramírez</a:t>
             </a:r>
             <a:endParaRPr lang="en-US" sz="800" dirty="0"/>
           </a:p>
@@ -29577,6 +30841,10 @@
             <a:prstDash val="solid"/>
           </a:ln>
         </p:spPr>
+        <p:txBody>
+          <a:bodyPr/>
+          <a:p/>
+        </p:txBody>
       </p:sp>
       <p:pic>
         <p:nvPicPr>
@@ -29641,6 +30909,30 @@
           </a:p>
         </p:txBody>
       </p:sp>
+      <p:pic>
+        <p:nvPicPr>
+          <p:cNvPr id="32" name="IE University logo" descr="IE University, School of Science &amp; Technology"/>
+          <p:cNvPicPr>
+            <a:picLocks noChangeAspect="1"/>
+          </p:cNvPicPr>
+          <p:nvPr/>
+        </p:nvPicPr>
+        <p:blipFill>
+          <a:blip r:embed="rId4"/>
+          <a:stretch>
+            <a:fillRect/>
+          </a:stretch>
+        </p:blipFill>
+        <p:spPr>
+          <a:xfrm>
+            <a:off x="8013607" y="92634"/>
+            <a:ext cx="764633" cy="262789"/>
+          </a:xfrm>
+          <a:prstGeom prst="rect">
+            <a:avLst/>
+          </a:prstGeom>
+        </p:spPr>
+      </p:pic>
     </p:spTree>
   </p:cSld>
   <p:clrMapOvr>
@@ -29706,7 +30998,7 @@
                 <a:ea typeface="Calibri" pitchFamily="34" charset="-122"/>
                 <a:cs typeface="Calibri" pitchFamily="34" charset="-120"/>
               </a:rPr>
-              <a:t>Master in Business Analytics and Big Data</a:t>
+              <a:t>Master in Business Analytics and Data Science</a:t>
             </a:r>
             <a:endParaRPr lang="en-US" sz="900" dirty="0"/>
           </a:p>
@@ -29745,7 +31037,7 @@
                 <a:ea typeface="Calibri" pitchFamily="34" charset="-122"/>
                 <a:cs typeface="Calibri" pitchFamily="34" charset="-120"/>
               </a:rPr>
-              <a:t>MLOps · MBABD-PT 2026–27 · Session 5 · Juan Ramírez</a:t>
+              <a:t>MLOps · MBDS-PT2026F · Session 5 · Juan Ramírez</a:t>
             </a:r>
             <a:endParaRPr lang="en-US" sz="800" dirty="0"/>
           </a:p>
@@ -29853,6 +31145,10 @@
             <a:prstDash val="solid"/>
           </a:ln>
         </p:spPr>
+        <p:txBody>
+          <a:bodyPr/>
+          <a:p/>
+        </p:txBody>
       </p:sp>
       <p:sp>
         <p:nvSpPr>
@@ -29995,6 +31291,10 @@
             <a:prstDash val="solid"/>
           </a:ln>
         </p:spPr>
+        <p:txBody>
+          <a:bodyPr/>
+          <a:p/>
+        </p:txBody>
       </p:sp>
       <p:sp>
         <p:nvSpPr>
@@ -30137,6 +31437,10 @@
             <a:prstDash val="solid"/>
           </a:ln>
         </p:spPr>
+        <p:txBody>
+          <a:bodyPr/>
+          <a:p/>
+        </p:txBody>
       </p:sp>
       <p:sp>
         <p:nvSpPr>
@@ -30255,6 +31559,30 @@
           </a:p>
         </p:txBody>
       </p:sp>
+      <p:pic>
+        <p:nvPicPr>
+          <p:cNvPr id="19" name="IE University logo" descr="IE University, School of Science &amp; Technology"/>
+          <p:cNvPicPr>
+            <a:picLocks noChangeAspect="1"/>
+          </p:cNvPicPr>
+          <p:nvPr/>
+        </p:nvPicPr>
+        <p:blipFill>
+          <a:blip r:embed="rId3"/>
+          <a:stretch>
+            <a:fillRect/>
+          </a:stretch>
+        </p:blipFill>
+        <p:spPr>
+          <a:xfrm>
+            <a:off x="8013607" y="92634"/>
+            <a:ext cx="764633" cy="262789"/>
+          </a:xfrm>
+          <a:prstGeom prst="rect">
+            <a:avLst/>
+          </a:prstGeom>
+        </p:spPr>
+      </p:pic>
     </p:spTree>
   </p:cSld>
   <p:clrMapOvr>
@@ -30320,7 +31648,7 @@
                 <a:ea typeface="Calibri" pitchFamily="34" charset="-122"/>
                 <a:cs typeface="Calibri" pitchFamily="34" charset="-120"/>
               </a:rPr>
-              <a:t>Master in Business Analytics and Big Data</a:t>
+              <a:t>Master in Business Analytics and Data Science</a:t>
             </a:r>
             <a:endParaRPr lang="en-US" sz="900" dirty="0"/>
           </a:p>
@@ -30359,7 +31687,7 @@
                 <a:ea typeface="Calibri" pitchFamily="34" charset="-122"/>
                 <a:cs typeface="Calibri" pitchFamily="34" charset="-120"/>
               </a:rPr>
-              <a:t>MLOps · MBABD-PT 2026–27 · Session 5 · Juan Ramírez</a:t>
+              <a:t>MLOps · MBDS-PT2026F · Session 5 · Juan Ramírez</a:t>
             </a:r>
             <a:endParaRPr lang="en-US" sz="800" dirty="0"/>
           </a:p>
@@ -30467,6 +31795,10 @@
             <a:prstDash val="solid"/>
           </a:ln>
         </p:spPr>
+        <p:txBody>
+          <a:bodyPr/>
+          <a:p/>
+        </p:txBody>
       </p:sp>
       <p:sp>
         <p:nvSpPr>
@@ -30570,6 +31902,10 @@
             <a:prstDash val="solid"/>
           </a:ln>
         </p:spPr>
+        <p:txBody>
+          <a:bodyPr/>
+          <a:p/>
+        </p:txBody>
       </p:sp>
       <p:sp>
         <p:nvSpPr>
@@ -30673,6 +32009,10 @@
             <a:prstDash val="solid"/>
           </a:ln>
         </p:spPr>
+        <p:txBody>
+          <a:bodyPr/>
+          <a:p/>
+        </p:txBody>
       </p:sp>
       <p:sp>
         <p:nvSpPr>
@@ -30778,6 +32118,10 @@
             <a:prstDash val="solid"/>
           </a:ln>
         </p:spPr>
+        <p:txBody>
+          <a:bodyPr/>
+          <a:p/>
+        </p:txBody>
       </p:sp>
       <p:pic>
         <p:nvPicPr>
@@ -30842,6 +32186,30 @@
           </a:p>
         </p:txBody>
       </p:sp>
+      <p:pic>
+        <p:nvPicPr>
+          <p:cNvPr id="19" name="IE University logo" descr="IE University, School of Science &amp; Technology"/>
+          <p:cNvPicPr>
+            <a:picLocks noChangeAspect="1"/>
+          </p:cNvPicPr>
+          <p:nvPr/>
+        </p:nvPicPr>
+        <p:blipFill>
+          <a:blip r:embed="rId4"/>
+          <a:stretch>
+            <a:fillRect/>
+          </a:stretch>
+        </p:blipFill>
+        <p:spPr>
+          <a:xfrm>
+            <a:off x="8013607" y="92634"/>
+            <a:ext cx="764633" cy="262789"/>
+          </a:xfrm>
+          <a:prstGeom prst="rect">
+            <a:avLst/>
+          </a:prstGeom>
+        </p:spPr>
+      </p:pic>
     </p:spTree>
   </p:cSld>
   <p:clrMapOvr>
@@ -30907,7 +32275,7 @@
                 <a:ea typeface="Calibri" pitchFamily="34" charset="-122"/>
                 <a:cs typeface="Calibri" pitchFamily="34" charset="-120"/>
               </a:rPr>
-              <a:t>Master in Business Analytics and Big Data</a:t>
+              <a:t>Master in Business Analytics and Data Science</a:t>
             </a:r>
             <a:endParaRPr lang="en-US" sz="900" dirty="0"/>
           </a:p>
@@ -30946,7 +32314,7 @@
                 <a:ea typeface="Calibri" pitchFamily="34" charset="-122"/>
                 <a:cs typeface="Calibri" pitchFamily="34" charset="-120"/>
               </a:rPr>
-              <a:t>MLOps · MBABD-PT 2026–27 · Session 5 · Juan Ramírez</a:t>
+              <a:t>MLOps · MBDS-PT2026F · Session 5 · Juan Ramírez</a:t>
             </a:r>
             <a:endParaRPr lang="en-US" sz="800" dirty="0"/>
           </a:p>
@@ -31056,6 +32424,10 @@
             <a:prstDash val="solid"/>
           </a:ln>
         </p:spPr>
+        <p:txBody>
+          <a:bodyPr/>
+          <a:p/>
+        </p:txBody>
       </p:sp>
       <p:sp>
         <p:nvSpPr>
@@ -31081,6 +32453,10 @@
             <a:prstDash val="solid"/>
           </a:ln>
         </p:spPr>
+        <p:txBody>
+          <a:bodyPr/>
+          <a:p/>
+        </p:txBody>
       </p:sp>
       <p:pic>
         <p:nvPicPr>
@@ -31235,6 +32611,10 @@
             <a:prstDash val="solid"/>
           </a:ln>
         </p:spPr>
+        <p:txBody>
+          <a:bodyPr/>
+          <a:p/>
+        </p:txBody>
       </p:sp>
       <p:sp>
         <p:nvSpPr>
@@ -31260,6 +32640,10 @@
             <a:prstDash val="solid"/>
           </a:ln>
         </p:spPr>
+        <p:txBody>
+          <a:bodyPr/>
+          <a:p/>
+        </p:txBody>
       </p:sp>
       <p:pic>
         <p:nvPicPr>
@@ -31435,6 +32819,10 @@
             <a:prstDash val="solid"/>
           </a:ln>
         </p:spPr>
+        <p:txBody>
+          <a:bodyPr/>
+          <a:p/>
+        </p:txBody>
       </p:sp>
       <p:sp>
         <p:nvSpPr>
@@ -31514,6 +32902,30 @@
           </a:p>
         </p:txBody>
       </p:sp>
+      <p:pic>
+        <p:nvPicPr>
+          <p:cNvPr id="20" name="IE University logo" descr="IE University, School of Science &amp; Technology"/>
+          <p:cNvPicPr>
+            <a:picLocks noChangeAspect="1"/>
+          </p:cNvPicPr>
+          <p:nvPr/>
+        </p:nvPicPr>
+        <p:blipFill>
+          <a:blip r:embed="rId5"/>
+          <a:stretch>
+            <a:fillRect/>
+          </a:stretch>
+        </p:blipFill>
+        <p:spPr>
+          <a:xfrm>
+            <a:off x="8013607" y="92634"/>
+            <a:ext cx="764633" cy="262789"/>
+          </a:xfrm>
+          <a:prstGeom prst="rect">
+            <a:avLst/>
+          </a:prstGeom>
+        </p:spPr>
+      </p:pic>
     </p:spTree>
   </p:cSld>
   <p:clrMapOvr>
@@ -31579,7 +32991,7 @@
                 <a:ea typeface="Calibri" pitchFamily="34" charset="-122"/>
                 <a:cs typeface="Calibri" pitchFamily="34" charset="-120"/>
               </a:rPr>
-              <a:t>Master in Business Analytics and Big Data</a:t>
+              <a:t>Master in Business Analytics and Data Science</a:t>
             </a:r>
             <a:endParaRPr lang="en-US" sz="900" dirty="0"/>
           </a:p>
@@ -31618,7 +33030,7 @@
                 <a:ea typeface="Calibri" pitchFamily="34" charset="-122"/>
                 <a:cs typeface="Calibri" pitchFamily="34" charset="-120"/>
               </a:rPr>
-              <a:t>MLOps · MBABD-PT 2026–27 · Session 5 · Juan Ramírez</a:t>
+              <a:t>MLOps · MBDS-PT2026F · Session 5 · Juan Ramírez</a:t>
             </a:r>
             <a:endParaRPr lang="en-US" sz="800" dirty="0"/>
           </a:p>
@@ -31741,6 +33153,30 @@
           </a:p>
         </p:txBody>
       </p:sp>
+      <p:pic>
+        <p:nvPicPr>
+          <p:cNvPr id="7" name="IE University logo" descr="IE University, School of Science &amp; Technology"/>
+          <p:cNvPicPr>
+            <a:picLocks noChangeAspect="1"/>
+          </p:cNvPicPr>
+          <p:nvPr/>
+        </p:nvPicPr>
+        <p:blipFill>
+          <a:blip r:embed="rId3"/>
+          <a:stretch>
+            <a:fillRect/>
+          </a:stretch>
+        </p:blipFill>
+        <p:spPr>
+          <a:xfrm>
+            <a:off x="8252653" y="109728"/>
+            <a:ext cx="525587" cy="704395"/>
+          </a:xfrm>
+          <a:prstGeom prst="rect">
+            <a:avLst/>
+          </a:prstGeom>
+        </p:spPr>
+      </p:pic>
     </p:spTree>
   </p:cSld>
   <p:clrMapOvr>
@@ -31806,7 +33242,7 @@
                 <a:ea typeface="Calibri" pitchFamily="34" charset="-122"/>
                 <a:cs typeface="Calibri" pitchFamily="34" charset="-120"/>
               </a:rPr>
-              <a:t>Master in Business Analytics and Big Data</a:t>
+              <a:t>Master in Business Analytics and Data Science</a:t>
             </a:r>
             <a:endParaRPr lang="en-US" sz="900" dirty="0"/>
           </a:p>
@@ -31845,7 +33281,7 @@
                 <a:ea typeface="Calibri" pitchFamily="34" charset="-122"/>
                 <a:cs typeface="Calibri" pitchFamily="34" charset="-120"/>
               </a:rPr>
-              <a:t>MLOps · MBABD-PT 2026–27 · Session 5 · Juan Ramírez</a:t>
+              <a:t>MLOps · MBDS-PT2026F · Session 5 · Juan Ramírez</a:t>
             </a:r>
             <a:endParaRPr lang="en-US" sz="800" dirty="0"/>
           </a:p>
@@ -31955,6 +33391,10 @@
             <a:prstDash val="solid"/>
           </a:ln>
         </p:spPr>
+        <p:txBody>
+          <a:bodyPr/>
+          <a:p/>
+        </p:txBody>
       </p:sp>
       <p:sp>
         <p:nvSpPr>
@@ -32138,6 +33578,10 @@
             <a:prstDash val="solid"/>
           </a:ln>
         </p:spPr>
+        <p:txBody>
+          <a:bodyPr/>
+          <a:p/>
+        </p:txBody>
       </p:sp>
       <p:sp>
         <p:nvSpPr>
@@ -32280,6 +33724,10 @@
             <a:prstDash val="solid"/>
           </a:ln>
         </p:spPr>
+        <p:txBody>
+          <a:bodyPr/>
+          <a:p/>
+        </p:txBody>
       </p:sp>
       <p:sp>
         <p:nvSpPr>
@@ -32422,6 +33870,10 @@
             <a:prstDash val="solid"/>
           </a:ln>
         </p:spPr>
+        <p:txBody>
+          <a:bodyPr/>
+          <a:p/>
+        </p:txBody>
       </p:sp>
       <p:sp>
         <p:nvSpPr>
@@ -32540,6 +33992,30 @@
           </a:p>
         </p:txBody>
       </p:sp>
+      <p:pic>
+        <p:nvPicPr>
+          <p:cNvPr id="21" name="IE University logo" descr="IE University, School of Science &amp; Technology"/>
+          <p:cNvPicPr>
+            <a:picLocks noChangeAspect="1"/>
+          </p:cNvPicPr>
+          <p:nvPr/>
+        </p:nvPicPr>
+        <p:blipFill>
+          <a:blip r:embed="rId3"/>
+          <a:stretch>
+            <a:fillRect/>
+          </a:stretch>
+        </p:blipFill>
+        <p:spPr>
+          <a:xfrm>
+            <a:off x="8013607" y="92634"/>
+            <a:ext cx="764633" cy="262789"/>
+          </a:xfrm>
+          <a:prstGeom prst="rect">
+            <a:avLst/>
+          </a:prstGeom>
+        </p:spPr>
+      </p:pic>
     </p:spTree>
   </p:cSld>
   <p:clrMapOvr>
@@ -32605,7 +34081,7 @@
                 <a:ea typeface="Calibri" pitchFamily="34" charset="-122"/>
                 <a:cs typeface="Calibri" pitchFamily="34" charset="-120"/>
               </a:rPr>
-              <a:t>Master in Business Analytics and Big Data</a:t>
+              <a:t>Master in Business Analytics and Data Science</a:t>
             </a:r>
             <a:endParaRPr lang="en-US" sz="900" dirty="0"/>
           </a:p>
@@ -32644,7 +34120,7 @@
                 <a:ea typeface="Calibri" pitchFamily="34" charset="-122"/>
                 <a:cs typeface="Calibri" pitchFamily="34" charset="-120"/>
               </a:rPr>
-              <a:t>MLOps · MBABD-PT 2026–27 · Session 5 · Juan Ramírez</a:t>
+              <a:t>MLOps · MBDS-PT2026F · Session 5 · Juan Ramírez</a:t>
             </a:r>
             <a:endParaRPr lang="en-US" sz="800" dirty="0"/>
           </a:p>
@@ -32752,6 +34228,10 @@
             <a:prstDash val="solid"/>
           </a:ln>
         </p:spPr>
+        <p:txBody>
+          <a:bodyPr/>
+          <a:p/>
+        </p:txBody>
       </p:sp>
       <p:sp>
         <p:nvSpPr>
@@ -32894,6 +34374,10 @@
             <a:prstDash val="solid"/>
           </a:ln>
         </p:spPr>
+        <p:txBody>
+          <a:bodyPr/>
+          <a:p/>
+        </p:txBody>
       </p:sp>
       <p:sp>
         <p:nvSpPr>
@@ -33036,6 +34520,10 @@
             <a:prstDash val="solid"/>
           </a:ln>
         </p:spPr>
+        <p:txBody>
+          <a:bodyPr/>
+          <a:p/>
+        </p:txBody>
       </p:sp>
       <p:sp>
         <p:nvSpPr>
@@ -33178,6 +34666,10 @@
             <a:prstDash val="solid"/>
           </a:ln>
         </p:spPr>
+        <p:txBody>
+          <a:bodyPr/>
+          <a:p/>
+        </p:txBody>
       </p:sp>
       <p:sp>
         <p:nvSpPr>
@@ -33322,6 +34814,10 @@
             <a:prstDash val="solid"/>
           </a:ln>
         </p:spPr>
+        <p:txBody>
+          <a:bodyPr/>
+          <a:p/>
+        </p:txBody>
       </p:sp>
       <p:sp>
         <p:nvSpPr>
@@ -33627,6 +35123,10 @@
             <a:prstDash val="solid"/>
           </a:ln>
         </p:spPr>
+        <p:txBody>
+          <a:bodyPr/>
+          <a:p/>
+        </p:txBody>
       </p:sp>
       <p:pic>
         <p:nvPicPr>
@@ -33691,6 +35191,30 @@
           </a:p>
         </p:txBody>
       </p:sp>
+      <p:pic>
+        <p:nvPicPr>
+          <p:cNvPr id="28" name="IE University logo" descr="IE University, School of Science &amp; Technology"/>
+          <p:cNvPicPr>
+            <a:picLocks noChangeAspect="1"/>
+          </p:cNvPicPr>
+          <p:nvPr/>
+        </p:nvPicPr>
+        <p:blipFill>
+          <a:blip r:embed="rId4"/>
+          <a:stretch>
+            <a:fillRect/>
+          </a:stretch>
+        </p:blipFill>
+        <p:spPr>
+          <a:xfrm>
+            <a:off x="8013607" y="92634"/>
+            <a:ext cx="764633" cy="262789"/>
+          </a:xfrm>
+          <a:prstGeom prst="rect">
+            <a:avLst/>
+          </a:prstGeom>
+        </p:spPr>
+      </p:pic>
     </p:spTree>
   </p:cSld>
   <p:clrMapOvr>
@@ -33756,7 +35280,7 @@
                 <a:ea typeface="Calibri" pitchFamily="34" charset="-122"/>
                 <a:cs typeface="Calibri" pitchFamily="34" charset="-120"/>
               </a:rPr>
-              <a:t>Master in Business Analytics and Big Data</a:t>
+              <a:t>Master in Business Analytics and Data Science</a:t>
             </a:r>
             <a:endParaRPr lang="en-US" sz="900" dirty="0"/>
           </a:p>
@@ -33795,7 +35319,7 @@
                 <a:ea typeface="Calibri" pitchFamily="34" charset="-122"/>
                 <a:cs typeface="Calibri" pitchFamily="34" charset="-120"/>
               </a:rPr>
-              <a:t>MLOps · MBABD-PT 2026–27 · Session 5 · Juan Ramírez</a:t>
+              <a:t>MLOps · MBDS-PT2026F · Session 5 · Juan Ramírez</a:t>
             </a:r>
             <a:endParaRPr lang="en-US" sz="800" dirty="0"/>
           </a:p>
@@ -33944,6 +35468,10 @@
             <a:prstDash val="solid"/>
           </a:ln>
         </p:spPr>
+        <p:txBody>
+          <a:bodyPr/>
+          <a:p/>
+        </p:txBody>
       </p:sp>
       <p:sp>
         <p:nvSpPr>
@@ -34117,6 +35645,10 @@
             <a:prstDash val="solid"/>
           </a:ln>
         </p:spPr>
+        <p:txBody>
+          <a:bodyPr/>
+          <a:p/>
+        </p:txBody>
       </p:sp>
       <p:sp>
         <p:nvSpPr>
@@ -34251,6 +35783,10 @@
             <a:prstDash val="solid"/>
           </a:ln>
         </p:spPr>
+        <p:txBody>
+          <a:bodyPr/>
+          <a:p/>
+        </p:txBody>
       </p:sp>
       <p:sp>
         <p:nvSpPr>
@@ -34276,6 +35812,10 @@
             <a:prstDash val="solid"/>
           </a:ln>
         </p:spPr>
+        <p:txBody>
+          <a:bodyPr/>
+          <a:p/>
+        </p:txBody>
       </p:sp>
       <p:pic>
         <p:nvPicPr>
@@ -34405,6 +35945,10 @@
             <a:prstDash val="solid"/>
           </a:ln>
         </p:spPr>
+        <p:txBody>
+          <a:bodyPr/>
+          <a:p/>
+        </p:txBody>
       </p:sp>
       <p:sp>
         <p:nvSpPr>
@@ -34430,6 +35974,10 @@
             <a:prstDash val="solid"/>
           </a:ln>
         </p:spPr>
+        <p:txBody>
+          <a:bodyPr/>
+          <a:p/>
+        </p:txBody>
       </p:sp>
       <p:pic>
         <p:nvPicPr>
@@ -34559,6 +36107,10 @@
             <a:prstDash val="solid"/>
           </a:ln>
         </p:spPr>
+        <p:txBody>
+          <a:bodyPr/>
+          <a:p/>
+        </p:txBody>
       </p:sp>
       <p:pic>
         <p:nvPicPr>
@@ -34623,6 +36175,30 @@
           </a:p>
         </p:txBody>
       </p:sp>
+      <p:pic>
+        <p:nvPicPr>
+          <p:cNvPr id="26" name="IE University logo" descr="IE University, School of Science &amp; Technology"/>
+          <p:cNvPicPr>
+            <a:picLocks noChangeAspect="1"/>
+          </p:cNvPicPr>
+          <p:nvPr/>
+        </p:nvPicPr>
+        <p:blipFill>
+          <a:blip r:embed="rId6"/>
+          <a:stretch>
+            <a:fillRect/>
+          </a:stretch>
+        </p:blipFill>
+        <p:spPr>
+          <a:xfrm>
+            <a:off x="8013607" y="92634"/>
+            <a:ext cx="764633" cy="262789"/>
+          </a:xfrm>
+          <a:prstGeom prst="rect">
+            <a:avLst/>
+          </a:prstGeom>
+        </p:spPr>
+      </p:pic>
     </p:spTree>
   </p:cSld>
   <p:clrMapOvr>
@@ -34688,7 +36264,7 @@
                 <a:ea typeface="Calibri" pitchFamily="34" charset="-122"/>
                 <a:cs typeface="Calibri" pitchFamily="34" charset="-120"/>
               </a:rPr>
-              <a:t>Master in Business Analytics and Big Data</a:t>
+              <a:t>Master in Business Analytics and Data Science</a:t>
             </a:r>
             <a:endParaRPr lang="en-US" sz="900" dirty="0"/>
           </a:p>
@@ -34727,7 +36303,7 @@
                 <a:ea typeface="Calibri" pitchFamily="34" charset="-122"/>
                 <a:cs typeface="Calibri" pitchFamily="34" charset="-120"/>
               </a:rPr>
-              <a:t>MLOps · MBABD-PT 2026–27 · Session 5 · Juan Ramírez</a:t>
+              <a:t>MLOps · MBDS-PT2026F · Session 5 · Juan Ramírez</a:t>
             </a:r>
             <a:endParaRPr lang="en-US" sz="800" dirty="0"/>
           </a:p>
@@ -34837,6 +36413,10 @@
             <a:prstDash val="solid"/>
           </a:ln>
         </p:spPr>
+        <p:txBody>
+          <a:bodyPr/>
+          <a:p/>
+        </p:txBody>
       </p:sp>
       <p:sp>
         <p:nvSpPr>
@@ -35088,6 +36668,10 @@
             <a:prstDash val="solid"/>
           </a:ln>
         </p:spPr>
+        <p:txBody>
+          <a:bodyPr/>
+          <a:p/>
+        </p:txBody>
       </p:sp>
       <p:sp>
         <p:nvSpPr>
@@ -35230,6 +36814,10 @@
             <a:prstDash val="solid"/>
           </a:ln>
         </p:spPr>
+        <p:txBody>
+          <a:bodyPr/>
+          <a:p/>
+        </p:txBody>
       </p:sp>
       <p:sp>
         <p:nvSpPr>
@@ -35372,6 +36960,10 @@
             <a:prstDash val="solid"/>
           </a:ln>
         </p:spPr>
+        <p:txBody>
+          <a:bodyPr/>
+          <a:p/>
+        </p:txBody>
       </p:sp>
       <p:sp>
         <p:nvSpPr>
@@ -35490,6 +37082,30 @@
           </a:p>
         </p:txBody>
       </p:sp>
+      <p:pic>
+        <p:nvPicPr>
+          <p:cNvPr id="21" name="IE University logo" descr="IE University, School of Science &amp; Technology"/>
+          <p:cNvPicPr>
+            <a:picLocks noChangeAspect="1"/>
+          </p:cNvPicPr>
+          <p:nvPr/>
+        </p:nvPicPr>
+        <p:blipFill>
+          <a:blip r:embed="rId3"/>
+          <a:stretch>
+            <a:fillRect/>
+          </a:stretch>
+        </p:blipFill>
+        <p:spPr>
+          <a:xfrm>
+            <a:off x="8013607" y="92634"/>
+            <a:ext cx="764633" cy="262789"/>
+          </a:xfrm>
+          <a:prstGeom prst="rect">
+            <a:avLst/>
+          </a:prstGeom>
+        </p:spPr>
+      </p:pic>
     </p:spTree>
   </p:cSld>
   <p:clrMapOvr>
@@ -35555,7 +37171,7 @@
                 <a:ea typeface="Calibri" pitchFamily="34" charset="-122"/>
                 <a:cs typeface="Calibri" pitchFamily="34" charset="-120"/>
               </a:rPr>
-              <a:t>Master in Business Analytics and Big Data</a:t>
+              <a:t>Master in Business Analytics and Data Science</a:t>
             </a:r>
             <a:endParaRPr lang="en-US" sz="900" dirty="0"/>
           </a:p>
@@ -35594,7 +37210,7 @@
                 <a:ea typeface="Calibri" pitchFamily="34" charset="-122"/>
                 <a:cs typeface="Calibri" pitchFamily="34" charset="-120"/>
               </a:rPr>
-              <a:t>MLOps · MBABD-PT 2026–27 · Session 5 · Juan Ramírez</a:t>
+              <a:t>MLOps · MBDS-PT2026F · Session 5 · Juan Ramírez</a:t>
             </a:r>
             <a:endParaRPr lang="en-US" sz="800" dirty="0"/>
           </a:p>
@@ -35743,6 +37359,10 @@
             <a:prstDash val="solid"/>
           </a:ln>
         </p:spPr>
+        <p:txBody>
+          <a:bodyPr/>
+          <a:p/>
+        </p:txBody>
       </p:sp>
       <p:sp>
         <p:nvSpPr>
@@ -35916,6 +37536,10 @@
             <a:prstDash val="solid"/>
           </a:ln>
         </p:spPr>
+        <p:txBody>
+          <a:bodyPr/>
+          <a:p/>
+        </p:txBody>
       </p:sp>
       <p:sp>
         <p:nvSpPr>
@@ -36175,6 +37799,10 @@
             <a:prstDash val="solid"/>
           </a:ln>
         </p:spPr>
+        <p:txBody>
+          <a:bodyPr/>
+          <a:p/>
+        </p:txBody>
       </p:sp>
       <p:pic>
         <p:nvPicPr>
@@ -36239,6 +37867,30 @@
           </a:p>
         </p:txBody>
       </p:sp>
+      <p:pic>
+        <p:nvPicPr>
+          <p:cNvPr id="16" name="IE University logo" descr="IE University, School of Science &amp; Technology"/>
+          <p:cNvPicPr>
+            <a:picLocks noChangeAspect="1"/>
+          </p:cNvPicPr>
+          <p:nvPr/>
+        </p:nvPicPr>
+        <p:blipFill>
+          <a:blip r:embed="rId4"/>
+          <a:stretch>
+            <a:fillRect/>
+          </a:stretch>
+        </p:blipFill>
+        <p:spPr>
+          <a:xfrm>
+            <a:off x="8013607" y="92634"/>
+            <a:ext cx="764633" cy="262789"/>
+          </a:xfrm>
+          <a:prstGeom prst="rect">
+            <a:avLst/>
+          </a:prstGeom>
+        </p:spPr>
+      </p:pic>
     </p:spTree>
   </p:cSld>
   <p:clrMapOvr>
@@ -36304,7 +37956,7 @@
                 <a:ea typeface="Calibri" pitchFamily="34" charset="-122"/>
                 <a:cs typeface="Calibri" pitchFamily="34" charset="-120"/>
               </a:rPr>
-              <a:t>Master in Business Analytics and Big Data</a:t>
+              <a:t>Master in Business Analytics and Data Science</a:t>
             </a:r>
             <a:endParaRPr lang="en-US" sz="900" dirty="0"/>
           </a:p>
@@ -36343,7 +37995,7 @@
                 <a:ea typeface="Calibri" pitchFamily="34" charset="-122"/>
                 <a:cs typeface="Calibri" pitchFamily="34" charset="-120"/>
               </a:rPr>
-              <a:t>MLOps · MBABD-PT 2026–27 · Session 5 · Juan Ramírez</a:t>
+              <a:t>MLOps · MBDS-PT2026F · Session 5 · Juan Ramírez</a:t>
             </a:r>
             <a:endParaRPr lang="en-US" sz="800" dirty="0"/>
           </a:p>
@@ -36451,6 +38103,10 @@
             <a:prstDash val="solid"/>
           </a:ln>
         </p:spPr>
+        <p:txBody>
+          <a:bodyPr/>
+          <a:p/>
+        </p:txBody>
       </p:sp>
       <p:pic>
         <p:nvPicPr>
@@ -36578,6 +38234,10 @@
             <a:prstDash val="solid"/>
           </a:ln>
         </p:spPr>
+        <p:txBody>
+          <a:bodyPr/>
+          <a:p/>
+        </p:txBody>
       </p:sp>
       <p:pic>
         <p:nvPicPr>
@@ -36705,6 +38365,10 @@
             <a:prstDash val="solid"/>
           </a:ln>
         </p:spPr>
+        <p:txBody>
+          <a:bodyPr/>
+          <a:p/>
+        </p:txBody>
       </p:sp>
       <p:pic>
         <p:nvPicPr>
@@ -36832,6 +38496,10 @@
             <a:prstDash val="solid"/>
           </a:ln>
         </p:spPr>
+        <p:txBody>
+          <a:bodyPr/>
+          <a:p/>
+        </p:txBody>
       </p:sp>
       <p:pic>
         <p:nvPicPr>
@@ -36959,6 +38627,10 @@
             <a:prstDash val="solid"/>
           </a:ln>
         </p:spPr>
+        <p:txBody>
+          <a:bodyPr/>
+          <a:p/>
+        </p:txBody>
       </p:sp>
       <p:pic>
         <p:nvPicPr>
@@ -37101,6 +38773,30 @@
           </a:p>
         </p:txBody>
       </p:sp>
+      <p:pic>
+        <p:nvPicPr>
+          <p:cNvPr id="28" name="IE University logo" descr="IE University, School of Science &amp; Technology"/>
+          <p:cNvPicPr>
+            <a:picLocks noChangeAspect="1"/>
+          </p:cNvPicPr>
+          <p:nvPr/>
+        </p:nvPicPr>
+        <p:blipFill>
+          <a:blip r:embed="rId8"/>
+          <a:stretch>
+            <a:fillRect/>
+          </a:stretch>
+        </p:blipFill>
+        <p:spPr>
+          <a:xfrm>
+            <a:off x="8013607" y="92634"/>
+            <a:ext cx="764633" cy="262789"/>
+          </a:xfrm>
+          <a:prstGeom prst="rect">
+            <a:avLst/>
+          </a:prstGeom>
+        </p:spPr>
+      </p:pic>
     </p:spTree>
   </p:cSld>
   <p:clrMapOvr>
@@ -37166,7 +38862,7 @@
                 <a:ea typeface="Calibri" pitchFamily="34" charset="-122"/>
                 <a:cs typeface="Calibri" pitchFamily="34" charset="-120"/>
               </a:rPr>
-              <a:t>Master in Business Analytics and Big Data</a:t>
+              <a:t>Master in Business Analytics and Data Science</a:t>
             </a:r>
             <a:endParaRPr lang="en-US" sz="900" dirty="0"/>
           </a:p>
@@ -37205,7 +38901,7 @@
                 <a:ea typeface="Calibri" pitchFamily="34" charset="-122"/>
                 <a:cs typeface="Calibri" pitchFamily="34" charset="-120"/>
               </a:rPr>
-              <a:t>MLOps · MBABD-PT 2026–27 · Session 5 · Juan Ramírez</a:t>
+              <a:t>MLOps · MBDS-PT2026F · Session 5 · Juan Ramírez</a:t>
             </a:r>
             <a:endParaRPr lang="en-US" sz="800" dirty="0"/>
           </a:p>
@@ -37315,6 +39011,10 @@
             <a:prstDash val="solid"/>
           </a:ln>
         </p:spPr>
+        <p:txBody>
+          <a:bodyPr/>
+          <a:p/>
+        </p:txBody>
       </p:sp>
       <p:sp>
         <p:nvSpPr>
@@ -37378,6 +39078,10 @@
             <a:tailEnd type="triangle"/>
           </a:ln>
         </p:spPr>
+        <p:txBody>
+          <a:bodyPr/>
+          <a:p/>
+        </p:txBody>
       </p:sp>
       <p:sp>
         <p:nvSpPr>
@@ -37405,6 +39109,10 @@
             <a:prstDash val="solid"/>
           </a:ln>
         </p:spPr>
+        <p:txBody>
+          <a:bodyPr/>
+          <a:p/>
+        </p:txBody>
       </p:sp>
       <p:sp>
         <p:nvSpPr>
@@ -37471,6 +39179,10 @@
             <a:prstDash val="solid"/>
           </a:ln>
         </p:spPr>
+        <p:txBody>
+          <a:bodyPr/>
+          <a:p/>
+        </p:txBody>
       </p:sp>
       <p:sp>
         <p:nvSpPr>
@@ -37534,6 +39246,10 @@
             <a:tailEnd type="triangle"/>
           </a:ln>
         </p:spPr>
+        <p:txBody>
+          <a:bodyPr/>
+          <a:p/>
+        </p:txBody>
       </p:sp>
       <p:sp>
         <p:nvSpPr>
@@ -37558,6 +39274,10 @@
             <a:tailEnd type="triangle"/>
           </a:ln>
         </p:spPr>
+        <p:txBody>
+          <a:bodyPr/>
+          <a:p/>
+        </p:txBody>
       </p:sp>
       <p:sp>
         <p:nvSpPr>
@@ -37585,6 +39305,10 @@
             <a:prstDash val="solid"/>
           </a:ln>
         </p:spPr>
+        <p:txBody>
+          <a:bodyPr/>
+          <a:p/>
+        </p:txBody>
       </p:sp>
       <p:sp>
         <p:nvSpPr>
@@ -37648,6 +39372,10 @@
             <a:tailEnd type="triangle"/>
           </a:ln>
         </p:spPr>
+        <p:txBody>
+          <a:bodyPr/>
+          <a:p/>
+        </p:txBody>
       </p:sp>
       <p:sp>
         <p:nvSpPr>
@@ -37675,6 +39403,10 @@
             <a:prstDash val="solid"/>
           </a:ln>
         </p:spPr>
+        <p:txBody>
+          <a:bodyPr/>
+          <a:p/>
+        </p:txBody>
       </p:sp>
       <p:sp>
         <p:nvSpPr>
@@ -37738,6 +39470,10 @@
             <a:tailEnd type="triangle"/>
           </a:ln>
         </p:spPr>
+        <p:txBody>
+          <a:bodyPr/>
+          <a:p/>
+        </p:txBody>
       </p:sp>
       <p:sp>
         <p:nvSpPr>
@@ -37765,6 +39501,10 @@
             <a:prstDash val="solid"/>
           </a:ln>
         </p:spPr>
+        <p:txBody>
+          <a:bodyPr/>
+          <a:p/>
+        </p:txBody>
       </p:sp>
       <p:sp>
         <p:nvSpPr>
@@ -37870,6 +39610,10 @@
             <a:prstDash val="solid"/>
           </a:ln>
         </p:spPr>
+        <p:txBody>
+          <a:bodyPr/>
+          <a:p/>
+        </p:txBody>
       </p:sp>
       <p:sp>
         <p:nvSpPr>
@@ -37895,6 +39639,10 @@
             <a:prstDash val="solid"/>
           </a:ln>
         </p:spPr>
+        <p:txBody>
+          <a:bodyPr/>
+          <a:p/>
+        </p:txBody>
       </p:sp>
       <p:pic>
         <p:nvPicPr>
@@ -38024,6 +39772,10 @@
             <a:prstDash val="solid"/>
           </a:ln>
         </p:spPr>
+        <p:txBody>
+          <a:bodyPr/>
+          <a:p/>
+        </p:txBody>
       </p:sp>
       <p:sp>
         <p:nvSpPr>
@@ -38049,6 +39801,10 @@
             <a:prstDash val="solid"/>
           </a:ln>
         </p:spPr>
+        <p:txBody>
+          <a:bodyPr/>
+          <a:p/>
+        </p:txBody>
       </p:sp>
       <p:pic>
         <p:nvPicPr>
@@ -38178,6 +39934,10 @@
             <a:prstDash val="solid"/>
           </a:ln>
         </p:spPr>
+        <p:txBody>
+          <a:bodyPr/>
+          <a:p/>
+        </p:txBody>
       </p:sp>
       <p:sp>
         <p:nvSpPr>
@@ -38203,6 +39963,10 @@
             <a:prstDash val="solid"/>
           </a:ln>
         </p:spPr>
+        <p:txBody>
+          <a:bodyPr/>
+          <a:p/>
+        </p:txBody>
       </p:sp>
       <p:pic>
         <p:nvPicPr>
@@ -38332,6 +40096,10 @@
             <a:prstDash val="solid"/>
           </a:ln>
         </p:spPr>
+        <p:txBody>
+          <a:bodyPr/>
+          <a:p/>
+        </p:txBody>
       </p:sp>
       <p:pic>
         <p:nvPicPr>
@@ -38396,6 +40164,30 @@
           </a:p>
         </p:txBody>
       </p:sp>
+      <p:pic>
+        <p:nvPicPr>
+          <p:cNvPr id="43" name="IE University logo" descr="IE University, School of Science &amp; Technology"/>
+          <p:cNvPicPr>
+            <a:picLocks noChangeAspect="1"/>
+          </p:cNvPicPr>
+          <p:nvPr/>
+        </p:nvPicPr>
+        <p:blipFill>
+          <a:blip r:embed="rId7"/>
+          <a:stretch>
+            <a:fillRect/>
+          </a:stretch>
+        </p:blipFill>
+        <p:spPr>
+          <a:xfrm>
+            <a:off x="8013607" y="92634"/>
+            <a:ext cx="764633" cy="262789"/>
+          </a:xfrm>
+          <a:prstGeom prst="rect">
+            <a:avLst/>
+          </a:prstGeom>
+        </p:spPr>
+      </p:pic>
     </p:spTree>
   </p:cSld>
   <p:clrMapOvr>
@@ -38461,7 +40253,7 @@
                 <a:ea typeface="Calibri" pitchFamily="34" charset="-122"/>
                 <a:cs typeface="Calibri" pitchFamily="34" charset="-120"/>
               </a:rPr>
-              <a:t>Master in Business Analytics and Big Data</a:t>
+              <a:t>Master in Business Analytics and Data Science</a:t>
             </a:r>
             <a:endParaRPr lang="en-US" sz="900" dirty="0"/>
           </a:p>
@@ -38500,7 +40292,7 @@
                 <a:ea typeface="Calibri" pitchFamily="34" charset="-122"/>
                 <a:cs typeface="Calibri" pitchFamily="34" charset="-120"/>
               </a:rPr>
-              <a:t>MLOps · MBABD-PT 2026–27 · Session 5 · Juan Ramírez</a:t>
+              <a:t>MLOps · MBDS-PT2026F · Session 5 · Juan Ramírez</a:t>
             </a:r>
             <a:endParaRPr lang="en-US" sz="800" dirty="0"/>
           </a:p>
@@ -38608,6 +40400,10 @@
             <a:prstDash val="solid"/>
           </a:ln>
         </p:spPr>
+        <p:txBody>
+          <a:bodyPr/>
+          <a:p/>
+        </p:txBody>
       </p:sp>
       <p:sp>
         <p:nvSpPr>
@@ -38672,6 +40468,10 @@
             <a:prstDash val="solid"/>
           </a:ln>
         </p:spPr>
+        <p:txBody>
+          <a:bodyPr/>
+          <a:p/>
+        </p:txBody>
       </p:sp>
       <p:sp>
         <p:nvSpPr>
@@ -38736,6 +40536,10 @@
             <a:prstDash val="solid"/>
           </a:ln>
         </p:spPr>
+        <p:txBody>
+          <a:bodyPr/>
+          <a:p/>
+        </p:txBody>
       </p:sp>
       <p:sp>
         <p:nvSpPr>
@@ -38800,6 +40604,10 @@
             <a:prstDash val="solid"/>
           </a:ln>
         </p:spPr>
+        <p:txBody>
+          <a:bodyPr/>
+          <a:p/>
+        </p:txBody>
       </p:sp>
       <p:sp>
         <p:nvSpPr>
@@ -38864,6 +40672,10 @@
             <a:prstDash val="solid"/>
           </a:ln>
         </p:spPr>
+        <p:txBody>
+          <a:bodyPr/>
+          <a:p/>
+        </p:txBody>
       </p:sp>
       <p:sp>
         <p:nvSpPr>
@@ -39125,6 +40937,10 @@
             <a:prstDash val="solid"/>
           </a:ln>
         </p:spPr>
+        <p:txBody>
+          <a:bodyPr/>
+          <a:p/>
+        </p:txBody>
       </p:sp>
       <p:pic>
         <p:nvPicPr>
@@ -39189,6 +41005,30 @@
           </a:p>
         </p:txBody>
       </p:sp>
+      <p:pic>
+        <p:nvPicPr>
+          <p:cNvPr id="25" name="IE University logo" descr="IE University, School of Science &amp; Technology"/>
+          <p:cNvPicPr>
+            <a:picLocks noChangeAspect="1"/>
+          </p:cNvPicPr>
+          <p:nvPr/>
+        </p:nvPicPr>
+        <p:blipFill>
+          <a:blip r:embed="rId4"/>
+          <a:stretch>
+            <a:fillRect/>
+          </a:stretch>
+        </p:blipFill>
+        <p:spPr>
+          <a:xfrm>
+            <a:off x="8013607" y="92634"/>
+            <a:ext cx="764633" cy="262789"/>
+          </a:xfrm>
+          <a:prstGeom prst="rect">
+            <a:avLst/>
+          </a:prstGeom>
+        </p:spPr>
+      </p:pic>
     </p:spTree>
   </p:cSld>
   <p:clrMapOvr>
@@ -39254,7 +41094,7 @@
                 <a:ea typeface="Calibri" pitchFamily="34" charset="-122"/>
                 <a:cs typeface="Calibri" pitchFamily="34" charset="-120"/>
               </a:rPr>
-              <a:t>Master in Business Analytics and Big Data</a:t>
+              <a:t>Master in Business Analytics and Data Science</a:t>
             </a:r>
             <a:endParaRPr lang="en-US" sz="900" dirty="0"/>
           </a:p>
@@ -39293,7 +41133,7 @@
                 <a:ea typeface="Calibri" pitchFamily="34" charset="-122"/>
                 <a:cs typeface="Calibri" pitchFamily="34" charset="-120"/>
               </a:rPr>
-              <a:t>MLOps · MBABD-PT 2026–27 · Session 5 · Juan Ramírez</a:t>
+              <a:t>MLOps · MBDS-PT2026F · Session 5 · Juan Ramírez</a:t>
             </a:r>
             <a:endParaRPr lang="en-US" sz="800" dirty="0"/>
           </a:p>
@@ -39442,6 +41282,10 @@
             <a:prstDash val="solid"/>
           </a:ln>
         </p:spPr>
+        <p:txBody>
+          <a:bodyPr/>
+          <a:p/>
+        </p:txBody>
       </p:sp>
       <p:sp>
         <p:nvSpPr>
@@ -39508,6 +41352,10 @@
             <a:prstDash val="solid"/>
           </a:ln>
         </p:spPr>
+        <p:txBody>
+          <a:bodyPr/>
+          <a:p/>
+        </p:txBody>
       </p:sp>
       <p:sp>
         <p:nvSpPr>
@@ -39574,6 +41422,10 @@
             <a:prstDash val="solid"/>
           </a:ln>
         </p:spPr>
+        <p:txBody>
+          <a:bodyPr/>
+          <a:p/>
+        </p:txBody>
       </p:sp>
       <p:sp>
         <p:nvSpPr>
@@ -39640,6 +41492,10 @@
             <a:prstDash val="solid"/>
           </a:ln>
         </p:spPr>
+        <p:txBody>
+          <a:bodyPr/>
+          <a:p/>
+        </p:txBody>
       </p:sp>
       <p:sp>
         <p:nvSpPr>
@@ -39706,6 +41562,10 @@
             <a:prstDash val="solid"/>
           </a:ln>
         </p:spPr>
+        <p:txBody>
+          <a:bodyPr/>
+          <a:p/>
+        </p:txBody>
       </p:sp>
       <p:sp>
         <p:nvSpPr>
@@ -39772,6 +41632,10 @@
             <a:prstDash val="solid"/>
           </a:ln>
         </p:spPr>
+        <p:txBody>
+          <a:bodyPr/>
+          <a:p/>
+        </p:txBody>
       </p:sp>
       <p:sp>
         <p:nvSpPr>
@@ -39838,6 +41702,10 @@
             <a:prstDash val="solid"/>
           </a:ln>
         </p:spPr>
+        <p:txBody>
+          <a:bodyPr/>
+          <a:p/>
+        </p:txBody>
       </p:sp>
       <p:sp>
         <p:nvSpPr>
@@ -39904,6 +41772,10 @@
             <a:prstDash val="solid"/>
           </a:ln>
         </p:spPr>
+        <p:txBody>
+          <a:bodyPr/>
+          <a:p/>
+        </p:txBody>
       </p:sp>
       <p:sp>
         <p:nvSpPr>
@@ -39970,6 +41842,10 @@
             <a:prstDash val="solid"/>
           </a:ln>
         </p:spPr>
+        <p:txBody>
+          <a:bodyPr/>
+          <a:p/>
+        </p:txBody>
       </p:sp>
       <p:sp>
         <p:nvSpPr>
@@ -40049,6 +41925,30 @@
           </a:p>
         </p:txBody>
       </p:sp>
+      <p:pic>
+        <p:nvPicPr>
+          <p:cNvPr id="26" name="IE University logo" descr="IE University, School of Science &amp; Technology"/>
+          <p:cNvPicPr>
+            <a:picLocks noChangeAspect="1"/>
+          </p:cNvPicPr>
+          <p:nvPr/>
+        </p:nvPicPr>
+        <p:blipFill>
+          <a:blip r:embed="rId3"/>
+          <a:stretch>
+            <a:fillRect/>
+          </a:stretch>
+        </p:blipFill>
+        <p:spPr>
+          <a:xfrm>
+            <a:off x="8252653" y="109728"/>
+            <a:ext cx="525587" cy="704395"/>
+          </a:xfrm>
+          <a:prstGeom prst="rect">
+            <a:avLst/>
+          </a:prstGeom>
+        </p:spPr>
+      </p:pic>
     </p:spTree>
   </p:cSld>
   <p:clrMapOvr>
@@ -40114,7 +42014,7 @@
                 <a:ea typeface="Calibri" pitchFamily="34" charset="-122"/>
                 <a:cs typeface="Calibri" pitchFamily="34" charset="-120"/>
               </a:rPr>
-              <a:t>Master in Business Analytics and Big Data</a:t>
+              <a:t>Master in Business Analytics and Data Science</a:t>
             </a:r>
             <a:endParaRPr lang="en-US" sz="900" dirty="0"/>
           </a:p>
@@ -40153,7 +42053,7 @@
                 <a:ea typeface="Calibri" pitchFamily="34" charset="-122"/>
                 <a:cs typeface="Calibri" pitchFamily="34" charset="-120"/>
               </a:rPr>
-              <a:t>MLOps · MBABD-PT 2026–27 · Session 5 · Juan Ramírez</a:t>
+              <a:t>MLOps · MBDS-PT2026F · Session 5 · Juan Ramírez</a:t>
             </a:r>
             <a:endParaRPr lang="en-US" sz="800" dirty="0"/>
           </a:p>
@@ -40263,6 +42163,10 @@
             <a:prstDash val="solid"/>
           </a:ln>
         </p:spPr>
+        <p:txBody>
+          <a:bodyPr/>
+          <a:p/>
+        </p:txBody>
       </p:sp>
       <p:sp>
         <p:nvSpPr>
@@ -40288,6 +42192,10 @@
             <a:prstDash val="solid"/>
           </a:ln>
         </p:spPr>
+        <p:txBody>
+          <a:bodyPr/>
+          <a:p/>
+        </p:txBody>
       </p:sp>
       <p:pic>
         <p:nvPicPr>
@@ -40442,6 +42350,10 @@
             <a:prstDash val="solid"/>
           </a:ln>
         </p:spPr>
+        <p:txBody>
+          <a:bodyPr/>
+          <a:p/>
+        </p:txBody>
       </p:sp>
       <p:sp>
         <p:nvSpPr>
@@ -40467,6 +42379,10 @@
             <a:prstDash val="solid"/>
           </a:ln>
         </p:spPr>
+        <p:txBody>
+          <a:bodyPr/>
+          <a:p/>
+        </p:txBody>
       </p:sp>
       <p:pic>
         <p:nvPicPr>
@@ -40621,6 +42537,10 @@
             <a:prstDash val="solid"/>
           </a:ln>
         </p:spPr>
+        <p:txBody>
+          <a:bodyPr/>
+          <a:p/>
+        </p:txBody>
       </p:sp>
       <p:sp>
         <p:nvSpPr>
@@ -40646,6 +42566,10 @@
             <a:prstDash val="solid"/>
           </a:ln>
         </p:spPr>
+        <p:txBody>
+          <a:bodyPr/>
+          <a:p/>
+        </p:txBody>
       </p:sp>
       <p:pic>
         <p:nvPicPr>
@@ -40800,6 +42724,10 @@
             <a:prstDash val="solid"/>
           </a:ln>
         </p:spPr>
+        <p:txBody>
+          <a:bodyPr/>
+          <a:p/>
+        </p:txBody>
       </p:sp>
       <p:pic>
         <p:nvPicPr>
@@ -40864,6 +42792,30 @@
           </a:p>
         </p:txBody>
       </p:sp>
+      <p:pic>
+        <p:nvPicPr>
+          <p:cNvPr id="25" name="IE University logo" descr="IE University, School of Science &amp; Technology"/>
+          <p:cNvPicPr>
+            <a:picLocks noChangeAspect="1"/>
+          </p:cNvPicPr>
+          <p:nvPr/>
+        </p:nvPicPr>
+        <p:blipFill>
+          <a:blip r:embed="rId7"/>
+          <a:stretch>
+            <a:fillRect/>
+          </a:stretch>
+        </p:blipFill>
+        <p:spPr>
+          <a:xfrm>
+            <a:off x="8013607" y="92634"/>
+            <a:ext cx="764633" cy="262789"/>
+          </a:xfrm>
+          <a:prstGeom prst="rect">
+            <a:avLst/>
+          </a:prstGeom>
+        </p:spPr>
+      </p:pic>
     </p:spTree>
   </p:cSld>
   <p:clrMapOvr>
@@ -40929,7 +42881,7 @@
                 <a:ea typeface="Calibri" pitchFamily="34" charset="-122"/>
                 <a:cs typeface="Calibri" pitchFamily="34" charset="-120"/>
               </a:rPr>
-              <a:t>Master in Business Analytics and Big Data</a:t>
+              <a:t>Master in Business Analytics and Data Science</a:t>
             </a:r>
             <a:endParaRPr lang="en-US" sz="900" dirty="0"/>
           </a:p>
@@ -40968,7 +42920,7 @@
                 <a:ea typeface="Calibri" pitchFamily="34" charset="-122"/>
                 <a:cs typeface="Calibri" pitchFamily="34" charset="-120"/>
               </a:rPr>
-              <a:t>MLOps · MBABD-PT 2026–27 · Session 5 · Juan Ramírez</a:t>
+              <a:t>MLOps · MBDS-PT2026F · Session 5 · Juan Ramírez</a:t>
             </a:r>
             <a:endParaRPr lang="en-US" sz="800" dirty="0"/>
           </a:p>
@@ -41078,6 +43030,10 @@
             <a:prstDash val="solid"/>
           </a:ln>
         </p:spPr>
+        <p:txBody>
+          <a:bodyPr/>
+          <a:p/>
+        </p:txBody>
       </p:sp>
       <p:sp>
         <p:nvSpPr>
@@ -41226,6 +43182,10 @@
             <a:tailEnd type="triangle"/>
           </a:ln>
         </p:spPr>
+        <p:txBody>
+          <a:bodyPr/>
+          <a:p/>
+        </p:txBody>
       </p:sp>
       <p:sp>
         <p:nvSpPr>
@@ -41253,6 +43213,10 @@
             <a:prstDash val="solid"/>
           </a:ln>
         </p:spPr>
+        <p:txBody>
+          <a:bodyPr/>
+          <a:p/>
+        </p:txBody>
       </p:sp>
       <p:sp>
         <p:nvSpPr>
@@ -41401,6 +43365,10 @@
             <a:tailEnd type="triangle"/>
           </a:ln>
         </p:spPr>
+        <p:txBody>
+          <a:bodyPr/>
+          <a:p/>
+        </p:txBody>
       </p:sp>
       <p:sp>
         <p:nvSpPr>
@@ -41428,6 +43396,10 @@
             <a:prstDash val="solid"/>
           </a:ln>
         </p:spPr>
+        <p:txBody>
+          <a:bodyPr/>
+          <a:p/>
+        </p:txBody>
       </p:sp>
       <p:sp>
         <p:nvSpPr>
@@ -41579,6 +43551,10 @@
             <a:prstDash val="solid"/>
           </a:ln>
         </p:spPr>
+        <p:txBody>
+          <a:bodyPr/>
+          <a:p/>
+        </p:txBody>
       </p:sp>
       <p:pic>
         <p:nvPicPr>
@@ -41682,6 +43658,30 @@
           </a:p>
         </p:txBody>
       </p:sp>
+      <p:pic>
+        <p:nvPicPr>
+          <p:cNvPr id="22" name="IE University logo" descr="IE University, School of Science &amp; Technology"/>
+          <p:cNvPicPr>
+            <a:picLocks noChangeAspect="1"/>
+          </p:cNvPicPr>
+          <p:nvPr/>
+        </p:nvPicPr>
+        <p:blipFill>
+          <a:blip r:embed="rId4"/>
+          <a:stretch>
+            <a:fillRect/>
+          </a:stretch>
+        </p:blipFill>
+        <p:spPr>
+          <a:xfrm>
+            <a:off x="8013607" y="92634"/>
+            <a:ext cx="764633" cy="262789"/>
+          </a:xfrm>
+          <a:prstGeom prst="rect">
+            <a:avLst/>
+          </a:prstGeom>
+        </p:spPr>
+      </p:pic>
     </p:spTree>
   </p:cSld>
   <p:clrMapOvr>
@@ -41747,7 +43747,7 @@
                 <a:ea typeface="Calibri" pitchFamily="34" charset="-122"/>
                 <a:cs typeface="Calibri" pitchFamily="34" charset="-120"/>
               </a:rPr>
-              <a:t>Master in Business Analytics and Big Data</a:t>
+              <a:t>Master in Business Analytics and Data Science</a:t>
             </a:r>
             <a:endParaRPr lang="en-US" sz="900" dirty="0"/>
           </a:p>
@@ -41786,7 +43786,7 @@
                 <a:ea typeface="Calibri" pitchFamily="34" charset="-122"/>
                 <a:cs typeface="Calibri" pitchFamily="34" charset="-120"/>
               </a:rPr>
-              <a:t>MLOps · MBABD-PT 2026–27 · Session 5 · Juan Ramírez</a:t>
+              <a:t>MLOps · MBDS-PT2026F · Session 5 · Juan Ramírez</a:t>
             </a:r>
             <a:endParaRPr lang="en-US" sz="800" dirty="0"/>
           </a:p>
@@ -41894,6 +43894,10 @@
             <a:prstDash val="solid"/>
           </a:ln>
         </p:spPr>
+        <p:txBody>
+          <a:bodyPr/>
+          <a:p/>
+        </p:txBody>
       </p:sp>
       <p:sp>
         <p:nvSpPr>
@@ -41958,6 +43962,10 @@
             <a:prstDash val="solid"/>
           </a:ln>
         </p:spPr>
+        <p:txBody>
+          <a:bodyPr/>
+          <a:p/>
+        </p:txBody>
       </p:sp>
       <p:sp>
         <p:nvSpPr>
@@ -42022,6 +44030,10 @@
             <a:prstDash val="solid"/>
           </a:ln>
         </p:spPr>
+        <p:txBody>
+          <a:bodyPr/>
+          <a:p/>
+        </p:txBody>
       </p:sp>
       <p:sp>
         <p:nvSpPr>
@@ -42086,6 +44098,10 @@
             <a:prstDash val="solid"/>
           </a:ln>
         </p:spPr>
+        <p:txBody>
+          <a:bodyPr/>
+          <a:p/>
+        </p:txBody>
       </p:sp>
       <p:sp>
         <p:nvSpPr>
@@ -42167,6 +44183,10 @@
             <a:prstDash val="solid"/>
           </a:ln>
         </p:spPr>
+        <p:txBody>
+          <a:bodyPr/>
+          <a:p/>
+        </p:txBody>
       </p:sp>
       <p:sp>
         <p:nvSpPr>
@@ -42231,6 +44251,10 @@
             <a:prstDash val="solid"/>
           </a:ln>
         </p:spPr>
+        <p:txBody>
+          <a:bodyPr/>
+          <a:p/>
+        </p:txBody>
       </p:sp>
       <p:sp>
         <p:nvSpPr>
@@ -42568,6 +44592,10 @@
             <a:prstDash val="solid"/>
           </a:ln>
         </p:spPr>
+        <p:txBody>
+          <a:bodyPr/>
+          <a:p/>
+        </p:txBody>
       </p:sp>
       <p:pic>
         <p:nvPicPr>
@@ -42695,6 +44723,10 @@
             <a:prstDash val="solid"/>
           </a:ln>
         </p:spPr>
+        <p:txBody>
+          <a:bodyPr/>
+          <a:p/>
+        </p:txBody>
       </p:sp>
       <p:pic>
         <p:nvPicPr>
@@ -42822,6 +44854,10 @@
             <a:prstDash val="solid"/>
           </a:ln>
         </p:spPr>
+        <p:txBody>
+          <a:bodyPr/>
+          <a:p/>
+        </p:txBody>
       </p:sp>
       <p:pic>
         <p:nvPicPr>
@@ -42949,6 +44985,10 @@
             <a:prstDash val="solid"/>
           </a:ln>
         </p:spPr>
+        <p:txBody>
+          <a:bodyPr/>
+          <a:p/>
+        </p:txBody>
       </p:sp>
       <p:pic>
         <p:nvPicPr>
@@ -43078,6 +45118,10 @@
             <a:prstDash val="solid"/>
           </a:ln>
         </p:spPr>
+        <p:txBody>
+          <a:bodyPr/>
+          <a:p/>
+        </p:txBody>
       </p:sp>
       <p:pic>
         <p:nvPicPr>
@@ -43142,6 +45186,30 @@
           </a:p>
         </p:txBody>
       </p:sp>
+      <p:pic>
+        <p:nvPicPr>
+          <p:cNvPr id="45" name="IE University logo" descr="IE University, School of Science &amp; Technology"/>
+          <p:cNvPicPr>
+            <a:picLocks noChangeAspect="1"/>
+          </p:cNvPicPr>
+          <p:nvPr/>
+        </p:nvPicPr>
+        <p:blipFill>
+          <a:blip r:embed="rId8"/>
+          <a:stretch>
+            <a:fillRect/>
+          </a:stretch>
+        </p:blipFill>
+        <p:spPr>
+          <a:xfrm>
+            <a:off x="8013607" y="92634"/>
+            <a:ext cx="764633" cy="262789"/>
+          </a:xfrm>
+          <a:prstGeom prst="rect">
+            <a:avLst/>
+          </a:prstGeom>
+        </p:spPr>
+      </p:pic>
     </p:spTree>
   </p:cSld>
   <p:clrMapOvr>
@@ -43207,7 +45275,7 @@
                 <a:ea typeface="Calibri" pitchFamily="34" charset="-122"/>
                 <a:cs typeface="Calibri" pitchFamily="34" charset="-120"/>
               </a:rPr>
-              <a:t>Master in Business Analytics and Big Data</a:t>
+              <a:t>Master in Business Analytics and Data Science</a:t>
             </a:r>
             <a:endParaRPr lang="en-US" sz="900" dirty="0"/>
           </a:p>
@@ -43246,7 +45314,7 @@
                 <a:ea typeface="Calibri" pitchFamily="34" charset="-122"/>
                 <a:cs typeface="Calibri" pitchFamily="34" charset="-120"/>
               </a:rPr>
-              <a:t>MLOps · MBABD-PT 2026–27 · Session 5 · Juan Ramírez</a:t>
+              <a:t>MLOps · MBDS-PT2026F · Session 5 · Juan Ramírez</a:t>
             </a:r>
             <a:endParaRPr lang="en-US" sz="800" dirty="0"/>
           </a:p>
@@ -43395,6 +45463,10 @@
             <a:prstDash val="solid"/>
           </a:ln>
         </p:spPr>
+        <p:txBody>
+          <a:bodyPr/>
+          <a:p/>
+        </p:txBody>
       </p:sp>
       <p:sp>
         <p:nvSpPr>
@@ -43461,6 +45533,10 @@
             <a:prstDash val="solid"/>
           </a:ln>
         </p:spPr>
+        <p:txBody>
+          <a:bodyPr/>
+          <a:p/>
+        </p:txBody>
       </p:sp>
       <p:sp>
         <p:nvSpPr>
@@ -43527,6 +45603,10 @@
             <a:prstDash val="solid"/>
           </a:ln>
         </p:spPr>
+        <p:txBody>
+          <a:bodyPr/>
+          <a:p/>
+        </p:txBody>
       </p:sp>
       <p:sp>
         <p:nvSpPr>
@@ -43593,6 +45673,10 @@
             <a:prstDash val="solid"/>
           </a:ln>
         </p:spPr>
+        <p:txBody>
+          <a:bodyPr/>
+          <a:p/>
+        </p:txBody>
       </p:sp>
       <p:sp>
         <p:nvSpPr>
@@ -43659,6 +45743,10 @@
             <a:prstDash val="solid"/>
           </a:ln>
         </p:spPr>
+        <p:txBody>
+          <a:bodyPr/>
+          <a:p/>
+        </p:txBody>
       </p:sp>
       <p:sp>
         <p:nvSpPr>
@@ -43725,6 +45813,10 @@
             <a:prstDash val="solid"/>
           </a:ln>
         </p:spPr>
+        <p:txBody>
+          <a:bodyPr/>
+          <a:p/>
+        </p:txBody>
       </p:sp>
       <p:sp>
         <p:nvSpPr>
@@ -43791,6 +45883,10 @@
             <a:prstDash val="solid"/>
           </a:ln>
         </p:spPr>
+        <p:txBody>
+          <a:bodyPr/>
+          <a:p/>
+        </p:txBody>
       </p:sp>
       <p:sp>
         <p:nvSpPr>
@@ -43857,6 +45953,10 @@
             <a:prstDash val="solid"/>
           </a:ln>
         </p:spPr>
+        <p:txBody>
+          <a:bodyPr/>
+          <a:p/>
+        </p:txBody>
       </p:sp>
       <p:sp>
         <p:nvSpPr>
@@ -43923,6 +46023,10 @@
             <a:prstDash val="solid"/>
           </a:ln>
         </p:spPr>
+        <p:txBody>
+          <a:bodyPr/>
+          <a:p/>
+        </p:txBody>
       </p:sp>
       <p:sp>
         <p:nvSpPr>
@@ -44002,6 +46106,30 @@
           </a:p>
         </p:txBody>
       </p:sp>
+      <p:pic>
+        <p:nvPicPr>
+          <p:cNvPr id="26" name="IE University logo" descr="IE University, School of Science &amp; Technology"/>
+          <p:cNvPicPr>
+            <a:picLocks noChangeAspect="1"/>
+          </p:cNvPicPr>
+          <p:nvPr/>
+        </p:nvPicPr>
+        <p:blipFill>
+          <a:blip r:embed="rId3"/>
+          <a:stretch>
+            <a:fillRect/>
+          </a:stretch>
+        </p:blipFill>
+        <p:spPr>
+          <a:xfrm>
+            <a:off x="8252653" y="109728"/>
+            <a:ext cx="525587" cy="704395"/>
+          </a:xfrm>
+          <a:prstGeom prst="rect">
+            <a:avLst/>
+          </a:prstGeom>
+        </p:spPr>
+      </p:pic>
     </p:spTree>
   </p:cSld>
   <p:clrMapOvr>

--- a/2026-27/S05/MLOps_S05_CICD_Deployment_Strategies.pptx
+++ b/2026-27/S05/MLOps_S05_CICD_Deployment_Strategies.pptx
@@ -16376,7 +16376,7 @@
       </p:sp>
       <p:graphicFrame>
         <p:nvGraphicFramePr>
-          <p:cNvPr id="3" name="Table 0"/>
+          <p:cNvPr id="21" name="Table 0"/>
           <p:cNvGraphicFramePr>
             <a:graphicFrameLocks noGrp="1"/>
           </p:cNvGraphicFramePr>

--- a/2026-27/S05/MLOps_S05_CICD_Deployment_Strategies.pptx
+++ b/2026-27/S05/MLOps_S05_CICD_Deployment_Strategies.pptx
@@ -4,6 +4,9 @@
   <p:sldMasterIdLst>
     <p:sldMasterId id="2147483648" r:id="rId1"/>
   </p:sldMasterIdLst>
+  <p:notesMasterIdLst>
+    <p:notesMasterId r:id="rId43"/>
+  </p:notesMasterIdLst>
   <p:sldIdLst>
     <p:sldId id="256" r:id="rId2"/>
     <p:sldId id="257" r:id="rId3"/>
@@ -47,9 +50,6 @@
     <p:sldId id="295" r:id="rId41"/>
     <p:sldId id="296" r:id="rId42"/>
   </p:sldIdLst>
-  <p:notesMasterIdLst>
-    <p:notesMasterId r:id="rId43"/>
-  </p:notesMasterIdLst>
   <p:sldSz cx="9144000" cy="5143500"/>
   <p:notesSz cx="5143500" cy="9144000"/>
   <p:defaultTextStyle>
@@ -169,234 +169,10 @@
           <a:chExt cx="0" cy="0"/>
         </a:xfrm>
       </p:grpSpPr>
-      <p:sp>
-        <p:nvSpPr>
-          <p:cNvPr id="2" name="Header Placeholder 1"/>
-          <p:cNvSpPr>
-            <a:spLocks noGrp="1"/>
-          </p:cNvSpPr>
-          <p:nvPr>
-            <p:ph type="hdr" sz="quarter"/>
-          </p:nvPr>
-        </p:nvSpPr>
-        <p:spPr>
-          <a:xfrm>
-            <a:off x="0" y="0"/>
-            <a:ext cx="2971800" cy="458788"/>
-          </a:xfrm>
-          <a:prstGeom prst="rect">
-            <a:avLst/>
-          </a:prstGeom>
-        </p:spPr>
-        <p:txBody>
-          <a:bodyPr vert="horz" lIns="91440" tIns="45720" rIns="91440" bIns="45720" rtlCol="0"/>
-          <a:lstStyle>
-            <a:lvl1pPr algn="l">
-              <a:defRPr sz="1200"/>
-            </a:lvl1pPr>
-          </a:lstStyle>
-          <a:p>
-            <a:endParaRPr lang="en-US"/>
-          </a:p>
-        </p:txBody>
-      </p:sp>
-      <p:sp>
-        <p:nvSpPr>
-          <p:cNvPr id="3" name="Date Placeholder 2"/>
-          <p:cNvSpPr>
-            <a:spLocks noGrp="1"/>
-          </p:cNvSpPr>
-          <p:nvPr>
-            <p:ph type="dt" idx="1"/>
-          </p:nvPr>
-        </p:nvSpPr>
-        <p:spPr>
-          <a:xfrm>
-            <a:off x="3884613" y="0"/>
-            <a:ext cx="2971800" cy="458788"/>
-          </a:xfrm>
-          <a:prstGeom prst="rect">
-            <a:avLst/>
-          </a:prstGeom>
-        </p:spPr>
-        <p:txBody>
-          <a:bodyPr vert="horz" lIns="91440" tIns="45720" rIns="91440" bIns="45720" rtlCol="0"/>
-          <a:lstStyle>
-            <a:lvl1pPr algn="r">
-              <a:defRPr sz="1200"/>
-            </a:lvl1pPr>
-          </a:lstStyle>
-          <a:p>
-            <a:fld id="{5282F153-3F37-0F45-9E97-73ACFA13230C}" type="datetimeFigureOut">
-              <a:rPr lang="en-US"/>
-              <a:t>7/23/19</a:t>
-            </a:fld>
-            <a:endParaRPr lang="en-US"/>
-          </a:p>
-        </p:txBody>
-      </p:sp>
-      <p:sp>
-        <p:nvSpPr>
-          <p:cNvPr id="4" name="Slide Image Placeholder 3"/>
-          <p:cNvSpPr>
-            <a:spLocks noGrp="1" noRot="1" noChangeAspect="1"/>
-          </p:cNvSpPr>
-          <p:nvPr>
-            <p:ph type="sldImg" idx="2"/>
-          </p:nvPr>
-        </p:nvSpPr>
-        <p:spPr>
-          <a:xfrm>
-            <a:off x="685800" y="1143000"/>
-            <a:ext cx="5486400" cy="3086100"/>
-          </a:xfrm>
-          <a:prstGeom prst="rect">
-            <a:avLst/>
-          </a:prstGeom>
-          <a:noFill/>
-          <a:ln w="12700">
-            <a:solidFill>
-              <a:prstClr val="black"/>
-            </a:solidFill>
-          </a:ln>
-        </p:spPr>
-        <p:txBody>
-          <a:bodyPr vert="horz" lIns="91440" tIns="45720" rIns="91440" bIns="45720" rtlCol="0" anchor="ctr"/>
-          <a:lstStyle/>
-          <a:p>
-            <a:endParaRPr lang="en-US"/>
-          </a:p>
-        </p:txBody>
-      </p:sp>
-      <p:sp>
-        <p:nvSpPr>
-          <p:cNvPr id="5" name="Notes Placeholder 4"/>
-          <p:cNvSpPr>
-            <a:spLocks noGrp="1"/>
-          </p:cNvSpPr>
-          <p:nvPr>
-            <p:ph type="body" sz="quarter" idx="3"/>
-          </p:nvPr>
-        </p:nvSpPr>
-        <p:spPr>
-          <a:xfrm>
-            <a:off x="685800" y="4400550"/>
-            <a:ext cx="5486400" cy="3600450"/>
-          </a:xfrm>
-          <a:prstGeom prst="rect">
-            <a:avLst/>
-          </a:prstGeom>
-        </p:spPr>
-        <p:txBody>
-          <a:bodyPr vert="horz" lIns="91440" tIns="45720" rIns="91440" bIns="45720" rtlCol="0"/>
-          <a:lstStyle/>
-          <a:p>
-            <a:pPr lvl="0"/>
-            <a:r>
-              <a:rPr lang="en-US"/>
-              <a:t>Click to edit Master text styles</a:t>
-            </a:r>
-          </a:p>
-          <a:p>
-            <a:pPr lvl="1"/>
-            <a:r>
-              <a:rPr lang="en-US"/>
-              <a:t>Second level</a:t>
-            </a:r>
-          </a:p>
-          <a:p>
-            <a:pPr lvl="2"/>
-            <a:r>
-              <a:rPr lang="en-US"/>
-              <a:t>Third level</a:t>
-            </a:r>
-          </a:p>
-          <a:p>
-            <a:pPr lvl="3"/>
-            <a:r>
-              <a:rPr lang="en-US"/>
-              <a:t>Fourth level</a:t>
-            </a:r>
-          </a:p>
-          <a:p>
-            <a:pPr lvl="4"/>
-            <a:r>
-              <a:rPr lang="en-US"/>
-              <a:t>Fifth level</a:t>
-            </a:r>
-          </a:p>
-        </p:txBody>
-      </p:sp>
-      <p:sp>
-        <p:nvSpPr>
-          <p:cNvPr id="6" name="Footer Placeholder 5"/>
-          <p:cNvSpPr>
-            <a:spLocks noGrp="1"/>
-          </p:cNvSpPr>
-          <p:nvPr>
-            <p:ph type="ftr" sz="quarter" idx="4"/>
-          </p:nvPr>
-        </p:nvSpPr>
-        <p:spPr>
-          <a:xfrm>
-            <a:off x="0" y="8685213"/>
-            <a:ext cx="2971800" cy="458787"/>
-          </a:xfrm>
-          <a:prstGeom prst="rect">
-            <a:avLst/>
-          </a:prstGeom>
-        </p:spPr>
-        <p:txBody>
-          <a:bodyPr vert="horz" lIns="91440" tIns="45720" rIns="91440" bIns="45720" rtlCol="0" anchor="b"/>
-          <a:lstStyle>
-            <a:lvl1pPr algn="l">
-              <a:defRPr sz="1200"/>
-            </a:lvl1pPr>
-          </a:lstStyle>
-          <a:p>
-            <a:endParaRPr lang="en-US"/>
-          </a:p>
-        </p:txBody>
-      </p:sp>
-      <p:sp>
-        <p:nvSpPr>
-          <p:cNvPr id="7" name="Slide Number Placeholder 6"/>
-          <p:cNvSpPr>
-            <a:spLocks noGrp="1"/>
-          </p:cNvSpPr>
-          <p:nvPr>
-            <p:ph type="sldNum" sz="quarter" idx="5"/>
-          </p:nvPr>
-        </p:nvSpPr>
-        <p:spPr>
-          <a:xfrm>
-            <a:off x="3884613" y="8685213"/>
-            <a:ext cx="2971800" cy="458787"/>
-          </a:xfrm>
-          <a:prstGeom prst="rect">
-            <a:avLst/>
-          </a:prstGeom>
-        </p:spPr>
-        <p:txBody>
-          <a:bodyPr vert="horz" lIns="91440" tIns="45720" rIns="91440" bIns="45720" rtlCol="0" anchor="b"/>
-          <a:lstStyle>
-            <a:lvl1pPr algn="r">
-              <a:defRPr sz="1200"/>
-            </a:lvl1pPr>
-          </a:lstStyle>
-          <a:p>
-            <a:fld id="{CE5E9CC1-C706-0F49-92D6-E571CC5EEA8F}" type="slidenum">
-              <a:rPr lang="en-US"/>
-              <a:t>‹#›</a:t>
-            </a:fld>
-            <a:endParaRPr lang="en-US"/>
-          </a:p>
-        </p:txBody>
-      </p:sp>
     </p:spTree>
     <p:extLst>
       <p:ext uri="{BB962C8B-B14F-4D97-AF65-F5344CB8AC3E}">
-        <p14:creationId xmlns:p14="http://schemas.microsoft.com/office/powerpoint/2010/main" val="1024086991"/>
+        <p14:creationId xmlns:p14="http://schemas.microsoft.com/office/powerpoint/2010/main" val="1133880120"/>
       </p:ext>
     </p:extLst>
   </p:cSld>
@@ -46431,4 +46207,319 @@
     </a:ext>
   </a:extLst>
 </a:theme>
+</file>
+
+<file path=ppt/theme/theme2.xml><?xml version="1.0" encoding="utf-8"?>
+<a:theme xmlns:a="http://schemas.openxmlformats.org/drawingml/2006/main" name="Office Theme">
+  <a:themeElements>
+    <a:clrScheme name="Office">
+      <a:dk1>
+        <a:sysClr val="windowText" lastClr="000000"/>
+      </a:dk1>
+      <a:lt1>
+        <a:sysClr val="window" lastClr="FFFFFF"/>
+      </a:lt1>
+      <a:dk2>
+        <a:srgbClr val="0E2841"/>
+      </a:dk2>
+      <a:lt2>
+        <a:srgbClr val="E8E8E8"/>
+      </a:lt2>
+      <a:accent1>
+        <a:srgbClr val="156082"/>
+      </a:accent1>
+      <a:accent2>
+        <a:srgbClr val="E97132"/>
+      </a:accent2>
+      <a:accent3>
+        <a:srgbClr val="196B24"/>
+      </a:accent3>
+      <a:accent4>
+        <a:srgbClr val="0F9ED5"/>
+      </a:accent4>
+      <a:accent5>
+        <a:srgbClr val="A02B93"/>
+      </a:accent5>
+      <a:accent6>
+        <a:srgbClr val="4EA72E"/>
+      </a:accent6>
+      <a:hlink>
+        <a:srgbClr val="467886"/>
+      </a:hlink>
+      <a:folHlink>
+        <a:srgbClr val="96607D"/>
+      </a:folHlink>
+    </a:clrScheme>
+    <a:fontScheme name="Office">
+      <a:majorFont>
+        <a:latin typeface="Aptos Display" panose="02110004020202020204"/>
+        <a:ea typeface=""/>
+        <a:cs typeface=""/>
+        <a:font script="Jpan" typeface="游ゴシック Light"/>
+        <a:font script="Hang" typeface="맑은 고딕"/>
+        <a:font script="Hans" typeface="等线 Light"/>
+        <a:font script="Hant" typeface="新細明體"/>
+        <a:font script="Arab" typeface="Times New Roman"/>
+        <a:font script="Hebr" typeface="Times New Roman"/>
+        <a:font script="Thai" typeface="Angsana New"/>
+        <a:font script="Ethi" typeface="Nyala"/>
+        <a:font script="Beng" typeface="Vrinda"/>
+        <a:font script="Gujr" typeface="Shruti"/>
+        <a:font script="Khmr" typeface="MoolBoran"/>
+        <a:font script="Knda" typeface="Tunga"/>
+        <a:font script="Guru" typeface="Raavi"/>
+        <a:font script="Cans" typeface="Euphemia"/>
+        <a:font script="Cher" typeface="Plantagenet Cherokee"/>
+        <a:font script="Yiii" typeface="Microsoft Yi Baiti"/>
+        <a:font script="Tibt" typeface="Microsoft Himalaya"/>
+        <a:font script="Thaa" typeface="MV Boli"/>
+        <a:font script="Deva" typeface="Mangal"/>
+        <a:font script="Telu" typeface="Gautami"/>
+        <a:font script="Taml" typeface="Latha"/>
+        <a:font script="Syrc" typeface="Estrangelo Edessa"/>
+        <a:font script="Orya" typeface="Kalinga"/>
+        <a:font script="Mlym" typeface="Kartika"/>
+        <a:font script="Laoo" typeface="DokChampa"/>
+        <a:font script="Sinh" typeface="Iskoola Pota"/>
+        <a:font script="Mong" typeface="Mongolian Baiti"/>
+        <a:font script="Viet" typeface="Times New Roman"/>
+        <a:font script="Uigh" typeface="Microsoft Uighur"/>
+        <a:font script="Geor" typeface="Sylfaen"/>
+        <a:font script="Armn" typeface="Arial"/>
+        <a:font script="Bugi" typeface="Leelawadee UI"/>
+        <a:font script="Bopo" typeface="Microsoft JhengHei"/>
+        <a:font script="Java" typeface="Javanese Text"/>
+        <a:font script="Lisu" typeface="Segoe UI"/>
+        <a:font script="Mymr" typeface="Myanmar Text"/>
+        <a:font script="Nkoo" typeface="Ebrima"/>
+        <a:font script="Olck" typeface="Nirmala UI"/>
+        <a:font script="Osma" typeface="Ebrima"/>
+        <a:font script="Phag" typeface="Phagspa"/>
+        <a:font script="Syrn" typeface="Estrangelo Edessa"/>
+        <a:font script="Syrj" typeface="Estrangelo Edessa"/>
+        <a:font script="Syre" typeface="Estrangelo Edessa"/>
+        <a:font script="Sora" typeface="Nirmala UI"/>
+        <a:font script="Tale" typeface="Microsoft Tai Le"/>
+        <a:font script="Talu" typeface="Microsoft New Tai Lue"/>
+        <a:font script="Tfng" typeface="Ebrima"/>
+      </a:majorFont>
+      <a:minorFont>
+        <a:latin typeface="Aptos" panose="02110004020202020204"/>
+        <a:ea typeface=""/>
+        <a:cs typeface=""/>
+        <a:font script="Jpan" typeface="游ゴシック"/>
+        <a:font script="Hang" typeface="맑은 고딕"/>
+        <a:font script="Hans" typeface="等线"/>
+        <a:font script="Hant" typeface="新細明體"/>
+        <a:font script="Arab" typeface="Arial"/>
+        <a:font script="Hebr" typeface="Arial"/>
+        <a:font script="Thai" typeface="Cordia New"/>
+        <a:font script="Ethi" typeface="Nyala"/>
+        <a:font script="Beng" typeface="Vrinda"/>
+        <a:font script="Gujr" typeface="Shruti"/>
+        <a:font script="Khmr" typeface="DaunPenh"/>
+        <a:font script="Knda" typeface="Tunga"/>
+        <a:font script="Guru" typeface="Raavi"/>
+        <a:font script="Cans" typeface="Euphemia"/>
+        <a:font script="Cher" typeface="Plantagenet Cherokee"/>
+        <a:font script="Yiii" typeface="Microsoft Yi Baiti"/>
+        <a:font script="Tibt" typeface="Microsoft Himalaya"/>
+        <a:font script="Thaa" typeface="MV Boli"/>
+        <a:font script="Deva" typeface="Mangal"/>
+        <a:font script="Telu" typeface="Gautami"/>
+        <a:font script="Taml" typeface="Latha"/>
+        <a:font script="Syrc" typeface="Estrangelo Edessa"/>
+        <a:font script="Orya" typeface="Kalinga"/>
+        <a:font script="Mlym" typeface="Kartika"/>
+        <a:font script="Laoo" typeface="DokChampa"/>
+        <a:font script="Sinh" typeface="Iskoola Pota"/>
+        <a:font script="Mong" typeface="Mongolian Baiti"/>
+        <a:font script="Viet" typeface="Arial"/>
+        <a:font script="Uigh" typeface="Microsoft Uighur"/>
+        <a:font script="Geor" typeface="Sylfaen"/>
+        <a:font script="Armn" typeface="Arial"/>
+        <a:font script="Bugi" typeface="Leelawadee UI"/>
+        <a:font script="Bopo" typeface="Microsoft JhengHei"/>
+        <a:font script="Java" typeface="Javanese Text"/>
+        <a:font script="Lisu" typeface="Segoe UI"/>
+        <a:font script="Mymr" typeface="Myanmar Text"/>
+        <a:font script="Nkoo" typeface="Ebrima"/>
+        <a:font script="Olck" typeface="Nirmala UI"/>
+        <a:font script="Osma" typeface="Ebrima"/>
+        <a:font script="Phag" typeface="Phagspa"/>
+        <a:font script="Syrn" typeface="Estrangelo Edessa"/>
+        <a:font script="Syrj" typeface="Estrangelo Edessa"/>
+        <a:font script="Syre" typeface="Estrangelo Edessa"/>
+        <a:font script="Sora" typeface="Nirmala UI"/>
+        <a:font script="Tale" typeface="Microsoft Tai Le"/>
+        <a:font script="Talu" typeface="Microsoft New Tai Lue"/>
+        <a:font script="Tfng" typeface="Ebrima"/>
+      </a:minorFont>
+    </a:fontScheme>
+    <a:fmtScheme name="Office">
+      <a:fillStyleLst>
+        <a:solidFill>
+          <a:schemeClr val="phClr"/>
+        </a:solidFill>
+        <a:gradFill rotWithShape="1">
+          <a:gsLst>
+            <a:gs pos="0">
+              <a:schemeClr val="phClr">
+                <a:lumMod val="110000"/>
+                <a:satMod val="105000"/>
+                <a:tint val="67000"/>
+              </a:schemeClr>
+            </a:gs>
+            <a:gs pos="50000">
+              <a:schemeClr val="phClr">
+                <a:lumMod val="105000"/>
+                <a:satMod val="103000"/>
+                <a:tint val="73000"/>
+              </a:schemeClr>
+            </a:gs>
+            <a:gs pos="100000">
+              <a:schemeClr val="phClr">
+                <a:lumMod val="105000"/>
+                <a:satMod val="109000"/>
+                <a:tint val="81000"/>
+              </a:schemeClr>
+            </a:gs>
+          </a:gsLst>
+          <a:lin ang="5400000" scaled="0"/>
+        </a:gradFill>
+        <a:gradFill rotWithShape="1">
+          <a:gsLst>
+            <a:gs pos="0">
+              <a:schemeClr val="phClr">
+                <a:satMod val="103000"/>
+                <a:lumMod val="102000"/>
+                <a:tint val="94000"/>
+              </a:schemeClr>
+            </a:gs>
+            <a:gs pos="50000">
+              <a:schemeClr val="phClr">
+                <a:satMod val="110000"/>
+                <a:lumMod val="100000"/>
+                <a:shade val="100000"/>
+              </a:schemeClr>
+            </a:gs>
+            <a:gs pos="100000">
+              <a:schemeClr val="phClr">
+                <a:lumMod val="99000"/>
+                <a:satMod val="120000"/>
+                <a:shade val="78000"/>
+              </a:schemeClr>
+            </a:gs>
+          </a:gsLst>
+          <a:lin ang="5400000" scaled="0"/>
+        </a:gradFill>
+      </a:fillStyleLst>
+      <a:lnStyleLst>
+        <a:ln w="12700" cap="flat" cmpd="sng" algn="ctr">
+          <a:solidFill>
+            <a:schemeClr val="phClr"/>
+          </a:solidFill>
+          <a:prstDash val="solid"/>
+          <a:miter lim="800000"/>
+        </a:ln>
+        <a:ln w="19050" cap="flat" cmpd="sng" algn="ctr">
+          <a:solidFill>
+            <a:schemeClr val="phClr"/>
+          </a:solidFill>
+          <a:prstDash val="solid"/>
+          <a:miter lim="800000"/>
+        </a:ln>
+        <a:ln w="25400" cap="flat" cmpd="sng" algn="ctr">
+          <a:solidFill>
+            <a:schemeClr val="phClr"/>
+          </a:solidFill>
+          <a:prstDash val="solid"/>
+          <a:miter lim="800000"/>
+        </a:ln>
+      </a:lnStyleLst>
+      <a:effectStyleLst>
+        <a:effectStyle>
+          <a:effectLst/>
+        </a:effectStyle>
+        <a:effectStyle>
+          <a:effectLst/>
+        </a:effectStyle>
+        <a:effectStyle>
+          <a:effectLst>
+            <a:outerShdw blurRad="57150" dist="19050" dir="5400000" algn="ctr" rotWithShape="0">
+              <a:srgbClr val="000000">
+                <a:alpha val="63000"/>
+              </a:srgbClr>
+            </a:outerShdw>
+          </a:effectLst>
+        </a:effectStyle>
+      </a:effectStyleLst>
+      <a:bgFillStyleLst>
+        <a:solidFill>
+          <a:schemeClr val="phClr"/>
+        </a:solidFill>
+        <a:solidFill>
+          <a:schemeClr val="phClr">
+            <a:tint val="95000"/>
+            <a:satMod val="170000"/>
+          </a:schemeClr>
+        </a:solidFill>
+        <a:gradFill rotWithShape="1">
+          <a:gsLst>
+            <a:gs pos="0">
+              <a:schemeClr val="phClr">
+                <a:tint val="93000"/>
+                <a:satMod val="150000"/>
+                <a:shade val="98000"/>
+                <a:lumMod val="102000"/>
+              </a:schemeClr>
+            </a:gs>
+            <a:gs pos="50000">
+              <a:schemeClr val="phClr">
+                <a:tint val="98000"/>
+                <a:satMod val="130000"/>
+                <a:shade val="90000"/>
+                <a:lumMod val="103000"/>
+              </a:schemeClr>
+            </a:gs>
+            <a:gs pos="100000">
+              <a:schemeClr val="phClr">
+                <a:shade val="63000"/>
+                <a:satMod val="120000"/>
+              </a:schemeClr>
+            </a:gs>
+          </a:gsLst>
+          <a:lin ang="5400000" scaled="0"/>
+        </a:gradFill>
+      </a:bgFillStyleLst>
+    </a:fmtScheme>
+  </a:themeElements>
+  <a:objectDefaults>
+    <a:lnDef>
+      <a:spPr/>
+      <a:bodyPr/>
+      <a:lstStyle/>
+      <a:style>
+        <a:lnRef idx="2">
+          <a:schemeClr val="accent1"/>
+        </a:lnRef>
+        <a:fillRef idx="0">
+          <a:schemeClr val="accent1"/>
+        </a:fillRef>
+        <a:effectRef idx="1">
+          <a:schemeClr val="accent1"/>
+        </a:effectRef>
+        <a:fontRef idx="minor">
+          <a:schemeClr val="tx1"/>
+        </a:fontRef>
+      </a:style>
+    </a:lnDef>
+  </a:objectDefaults>
+  <a:extraClrSchemeLst/>
+  <a:extLst>
+    <a:ext uri="{05A4C25C-085E-4340-85A3-A5531E510DB2}">
+      <thm15:themeFamily xmlns:thm15="http://schemas.microsoft.com/office/thememl/2012/main" name="Office Theme" id="{2E142A2C-CD16-42D6-873A-C26D2A0506FA}" vid="{1BDDFF52-6CD6-40A5-AB3C-68EB2F1E4D0A}"/>
+    </a:ext>
+  </a:extLst>
+</a:theme>
 </file>
--- a/2026-27/S05/MLOps_S05_CICD_Deployment_Strategies.pptx
+++ b/2026-27/S05/MLOps_S05_CICD_Deployment_Strategies.pptx
@@ -24904,9 +24904,9 @@
           <p:nvPr/>
         </p:nvSpPr>
         <p:spPr>
-          <a:xfrm>
-            <a:off x="3886200" y="3858768"/>
-            <a:ext cx="457200" cy="-457200"/>
+          <a:xfrm flipV="1">
+            <a:off x="3886200" y="3401568"/>
+            <a:ext cx="457200" cy="457200"/>
           </a:xfrm>
           <a:prstGeom prst="line">
             <a:avLst/>
@@ -39034,9 +39034,9 @@
           <p:nvPr/>
         </p:nvSpPr>
         <p:spPr>
-          <a:xfrm>
-            <a:off x="3493008" y="2011680"/>
-            <a:ext cx="320040" cy="-256032"/>
+          <a:xfrm flipV="1">
+            <a:off x="3493008" y="1755648"/>
+            <a:ext cx="320040" cy="256032"/>
           </a:xfrm>
           <a:prstGeom prst="line">
             <a:avLst/>
